--- a/Flowcharts/flowchart I&V.pptx
+++ b/Flowcharts/flowchart I&V.pptx
@@ -108,24 +108,51 @@
       </a:defRPr>
     </a:lvl9pPr>
   </p:defaultTextStyle>
-  <p:extLst>
-    <p:ext uri="{EFAFB233-063F-42B5-8137-9DF3F51BA10A}">
-      <p15:sldGuideLst xmlns:p15="http://schemas.microsoft.com/office/powerpoint/2012/main"/>
-    </p:ext>
-  </p:extLst>
 </p:presentation>
-</file>
-
-<file path=ppt/revisionInfo.xml><?xml version="1.0" encoding="utf-8"?>
-<p1510:revInfo xmlns:a="http://schemas.openxmlformats.org/drawingml/2006/main" xmlns:r="http://schemas.openxmlformats.org/officeDocument/2006/relationships" xmlns:p1510="http://schemas.microsoft.com/office/powerpoint/2015/10/main">
-  <p1510:revLst>
-    <p1510:client id="{7C745AE5-C96C-449D-A027-756FD2221ED8}" v="7" dt="2026-02-16T15:37:39.579"/>
-  </p1510:revLst>
-</p1510:revInfo>
 </file>
 
 <file path=ppt/changesInfos/changesInfo1.xml><?xml version="1.0" encoding="utf-8"?>
 <pc:chgInfo xmlns:a="http://schemas.openxmlformats.org/drawingml/2006/main" xmlns:r="http://schemas.openxmlformats.org/officeDocument/2006/relationships" xmlns:ac="http://schemas.microsoft.com/office/drawing/2013/main/command" xmlns:pc="http://schemas.microsoft.com/office/powerpoint/2013/main/command">
+  <pc:docChgLst>
+    <pc:chgData name="Jan Albert Driessen" userId="9a2e64e7-ae7d-4d91-8767-dcef5926c689" providerId="ADAL" clId="{D1A2D963-A4FB-41F2-A88A-31DFF53D9955}"/>
+    <pc:docChg chg="modSld">
+      <pc:chgData name="Jan Albert Driessen" userId="9a2e64e7-ae7d-4d91-8767-dcef5926c689" providerId="ADAL" clId="{D1A2D963-A4FB-41F2-A88A-31DFF53D9955}" dt="2026-02-17T00:43:39.131" v="13" actId="11529"/>
+      <pc:docMkLst>
+        <pc:docMk/>
+      </pc:docMkLst>
+      <pc:sldChg chg="addSp modSp mod">
+        <pc:chgData name="Jan Albert Driessen" userId="9a2e64e7-ae7d-4d91-8767-dcef5926c689" providerId="ADAL" clId="{D1A2D963-A4FB-41F2-A88A-31DFF53D9955}" dt="2026-02-17T00:43:39.131" v="13" actId="11529"/>
+        <pc:sldMkLst>
+          <pc:docMk/>
+          <pc:sldMk cId="3055226792" sldId="257"/>
+        </pc:sldMkLst>
+        <pc:spChg chg="mod">
+          <ac:chgData name="Jan Albert Driessen" userId="9a2e64e7-ae7d-4d91-8767-dcef5926c689" providerId="ADAL" clId="{D1A2D963-A4FB-41F2-A88A-31DFF53D9955}" dt="2026-02-16T21:38:06.043" v="1" actId="20577"/>
+          <ac:spMkLst>
+            <pc:docMk/>
+            <pc:sldMk cId="3055226792" sldId="257"/>
+            <ac:spMk id="2" creationId="{D12AF151-ED95-4E57-3EB2-DBAAF6FE18C0}"/>
+          </ac:spMkLst>
+        </pc:spChg>
+        <pc:spChg chg="mod">
+          <ac:chgData name="Jan Albert Driessen" userId="9a2e64e7-ae7d-4d91-8767-dcef5926c689" providerId="ADAL" clId="{D1A2D963-A4FB-41F2-A88A-31DFF53D9955}" dt="2026-02-16T21:39:55.499" v="12" actId="255"/>
+          <ac:spMkLst>
+            <pc:docMk/>
+            <pc:sldMk cId="3055226792" sldId="257"/>
+            <ac:spMk id="4" creationId="{0D581F1C-A857-055C-6678-C358EACE7E35}"/>
+          </ac:spMkLst>
+        </pc:spChg>
+        <pc:spChg chg="add">
+          <ac:chgData name="Jan Albert Driessen" userId="9a2e64e7-ae7d-4d91-8767-dcef5926c689" providerId="ADAL" clId="{D1A2D963-A4FB-41F2-A88A-31DFF53D9955}" dt="2026-02-17T00:43:39.131" v="13" actId="11529"/>
+          <ac:spMkLst>
+            <pc:docMk/>
+            <pc:sldMk cId="3055226792" sldId="257"/>
+            <ac:spMk id="9" creationId="{4085E6FC-3724-F590-D8FB-8F4CEB4FF634}"/>
+          </ac:spMkLst>
+        </pc:spChg>
+      </pc:sldChg>
+    </pc:docChg>
+  </pc:docChgLst>
   <pc:docChgLst>
     <pc:chgData name="Pelle Wijnstra" userId="8220ffc7ff044ae6" providerId="LiveId" clId="{5D3ACB51-A774-4B4F-B24D-450109E54B8F}"/>
     <pc:docChg chg="undo custSel modSld">
@@ -213,46 +240,6 @@
       </pc:sldChg>
     </pc:docChg>
   </pc:docChgLst>
-  <pc:docChgLst>
-    <pc:chgData name="Jan Albert Driessen" userId="9a2e64e7-ae7d-4d91-8767-dcef5926c689" providerId="ADAL" clId="{D1A2D963-A4FB-41F2-A88A-31DFF53D9955}"/>
-    <pc:docChg chg="modSld">
-      <pc:chgData name="Jan Albert Driessen" userId="9a2e64e7-ae7d-4d91-8767-dcef5926c689" providerId="ADAL" clId="{D1A2D963-A4FB-41F2-A88A-31DFF53D9955}" dt="2026-02-17T00:43:39.131" v="13" actId="11529"/>
-      <pc:docMkLst>
-        <pc:docMk/>
-      </pc:docMkLst>
-      <pc:sldChg chg="addSp modSp mod">
-        <pc:chgData name="Jan Albert Driessen" userId="9a2e64e7-ae7d-4d91-8767-dcef5926c689" providerId="ADAL" clId="{D1A2D963-A4FB-41F2-A88A-31DFF53D9955}" dt="2026-02-17T00:43:39.131" v="13" actId="11529"/>
-        <pc:sldMkLst>
-          <pc:docMk/>
-          <pc:sldMk cId="3055226792" sldId="257"/>
-        </pc:sldMkLst>
-        <pc:spChg chg="mod">
-          <ac:chgData name="Jan Albert Driessen" userId="9a2e64e7-ae7d-4d91-8767-dcef5926c689" providerId="ADAL" clId="{D1A2D963-A4FB-41F2-A88A-31DFF53D9955}" dt="2026-02-16T21:38:06.043" v="1" actId="20577"/>
-          <ac:spMkLst>
-            <pc:docMk/>
-            <pc:sldMk cId="3055226792" sldId="257"/>
-            <ac:spMk id="2" creationId="{D12AF151-ED95-4E57-3EB2-DBAAF6FE18C0}"/>
-          </ac:spMkLst>
-        </pc:spChg>
-        <pc:spChg chg="mod">
-          <ac:chgData name="Jan Albert Driessen" userId="9a2e64e7-ae7d-4d91-8767-dcef5926c689" providerId="ADAL" clId="{D1A2D963-A4FB-41F2-A88A-31DFF53D9955}" dt="2026-02-16T21:39:55.499" v="12" actId="255"/>
-          <ac:spMkLst>
-            <pc:docMk/>
-            <pc:sldMk cId="3055226792" sldId="257"/>
-            <ac:spMk id="4" creationId="{0D581F1C-A857-055C-6678-C358EACE7E35}"/>
-          </ac:spMkLst>
-        </pc:spChg>
-        <pc:spChg chg="add">
-          <ac:chgData name="Jan Albert Driessen" userId="9a2e64e7-ae7d-4d91-8767-dcef5926c689" providerId="ADAL" clId="{D1A2D963-A4FB-41F2-A88A-31DFF53D9955}" dt="2026-02-17T00:43:39.131" v="13" actId="11529"/>
-          <ac:spMkLst>
-            <pc:docMk/>
-            <pc:sldMk cId="3055226792" sldId="257"/>
-            <ac:spMk id="9" creationId="{4085E6FC-3724-F590-D8FB-8F4CEB4FF634}"/>
-          </ac:spMkLst>
-        </pc:spChg>
-      </pc:sldChg>
-    </pc:docChg>
-  </pc:docChgLst>
 </pc:chgInfo>
 </file>
 
@@ -338,7 +325,7 @@
           <a:p>
             <a:fld id="{527883EE-8E19-4C44-9477-790D07DE6C39}" type="datetimeFigureOut">
               <a:rPr lang="nl-NL" smtClean="0"/>
-              <a:t>16-2-2026</a:t>
+              <a:t>23-2-2026</a:t>
             </a:fld>
             <a:endParaRPr lang="nl-NL"/>
           </a:p>
@@ -649,7 +636,7 @@
           <a:bodyPr/>
           <a:lstStyle/>
           <a:p>
-            <a:endParaRPr lang="nl-NL" dirty="0"/>
+            <a:endParaRPr lang="nl-NL"/>
           </a:p>
         </p:txBody>
       </p:sp>
@@ -836,7 +823,7 @@
           <a:p>
             <a:fld id="{1AC29ED6-F496-4EC6-873F-F305C5846261}" type="datetimeFigureOut">
               <a:rPr lang="nl-NL" smtClean="0"/>
-              <a:t>16-2-2026</a:t>
+              <a:t>23-2-2026</a:t>
             </a:fld>
             <a:endParaRPr lang="nl-NL"/>
           </a:p>
@@ -1034,7 +1021,7 @@
           <a:p>
             <a:fld id="{1AC29ED6-F496-4EC6-873F-F305C5846261}" type="datetimeFigureOut">
               <a:rPr lang="nl-NL" smtClean="0"/>
-              <a:t>16-2-2026</a:t>
+              <a:t>23-2-2026</a:t>
             </a:fld>
             <a:endParaRPr lang="nl-NL"/>
           </a:p>
@@ -1242,7 +1229,7 @@
           <a:p>
             <a:fld id="{1AC29ED6-F496-4EC6-873F-F305C5846261}" type="datetimeFigureOut">
               <a:rPr lang="nl-NL" smtClean="0"/>
-              <a:t>16-2-2026</a:t>
+              <a:t>23-2-2026</a:t>
             </a:fld>
             <a:endParaRPr lang="nl-NL"/>
           </a:p>
@@ -1440,7 +1427,7 @@
           <a:p>
             <a:fld id="{1AC29ED6-F496-4EC6-873F-F305C5846261}" type="datetimeFigureOut">
               <a:rPr lang="nl-NL" smtClean="0"/>
-              <a:t>16-2-2026</a:t>
+              <a:t>23-2-2026</a:t>
             </a:fld>
             <a:endParaRPr lang="nl-NL"/>
           </a:p>
@@ -1715,7 +1702,7 @@
           <a:p>
             <a:fld id="{1AC29ED6-F496-4EC6-873F-F305C5846261}" type="datetimeFigureOut">
               <a:rPr lang="nl-NL" smtClean="0"/>
-              <a:t>16-2-2026</a:t>
+              <a:t>23-2-2026</a:t>
             </a:fld>
             <a:endParaRPr lang="nl-NL"/>
           </a:p>
@@ -1980,7 +1967,7 @@
           <a:p>
             <a:fld id="{1AC29ED6-F496-4EC6-873F-F305C5846261}" type="datetimeFigureOut">
               <a:rPr lang="nl-NL" smtClean="0"/>
-              <a:t>16-2-2026</a:t>
+              <a:t>23-2-2026</a:t>
             </a:fld>
             <a:endParaRPr lang="nl-NL"/>
           </a:p>
@@ -2392,7 +2379,7 @@
           <a:p>
             <a:fld id="{1AC29ED6-F496-4EC6-873F-F305C5846261}" type="datetimeFigureOut">
               <a:rPr lang="nl-NL" smtClean="0"/>
-              <a:t>16-2-2026</a:t>
+              <a:t>23-2-2026</a:t>
             </a:fld>
             <a:endParaRPr lang="nl-NL"/>
           </a:p>
@@ -2533,7 +2520,7 @@
           <a:p>
             <a:fld id="{1AC29ED6-F496-4EC6-873F-F305C5846261}" type="datetimeFigureOut">
               <a:rPr lang="nl-NL" smtClean="0"/>
-              <a:t>16-2-2026</a:t>
+              <a:t>23-2-2026</a:t>
             </a:fld>
             <a:endParaRPr lang="nl-NL"/>
           </a:p>
@@ -2646,7 +2633,7 @@
           <a:p>
             <a:fld id="{1AC29ED6-F496-4EC6-873F-F305C5846261}" type="datetimeFigureOut">
               <a:rPr lang="nl-NL" smtClean="0"/>
-              <a:t>16-2-2026</a:t>
+              <a:t>23-2-2026</a:t>
             </a:fld>
             <a:endParaRPr lang="nl-NL"/>
           </a:p>
@@ -2957,7 +2944,7 @@
           <a:p>
             <a:fld id="{1AC29ED6-F496-4EC6-873F-F305C5846261}" type="datetimeFigureOut">
               <a:rPr lang="nl-NL" smtClean="0"/>
-              <a:t>16-2-2026</a:t>
+              <a:t>23-2-2026</a:t>
             </a:fld>
             <a:endParaRPr lang="nl-NL"/>
           </a:p>
@@ -3245,7 +3232,7 @@
           <a:p>
             <a:fld id="{1AC29ED6-F496-4EC6-873F-F305C5846261}" type="datetimeFigureOut">
               <a:rPr lang="nl-NL" smtClean="0"/>
-              <a:t>16-2-2026</a:t>
+              <a:t>23-2-2026</a:t>
             </a:fld>
             <a:endParaRPr lang="nl-NL"/>
           </a:p>
@@ -3486,7 +3473,7 @@
           <a:p>
             <a:fld id="{1AC29ED6-F496-4EC6-873F-F305C5846261}" type="datetimeFigureOut">
               <a:rPr lang="nl-NL" smtClean="0"/>
-              <a:t>16-2-2026</a:t>
+              <a:t>23-2-2026</a:t>
             </a:fld>
             <a:endParaRPr lang="nl-NL"/>
           </a:p>
@@ -4098,7 +4085,7 @@
           <a:lstStyle/>
           <a:p>
             <a:pPr algn="ctr"/>
-            <a:endParaRPr lang="nl-NL" dirty="0"/>
+            <a:endParaRPr lang="nl-NL"/>
           </a:p>
         </p:txBody>
       </p:sp>
@@ -4227,7 +4214,7 @@
           <a:lstStyle/>
           <a:p>
             <a:r>
-              <a:rPr lang="nl-NL" dirty="0"/>
+              <a:rPr lang="nl-NL"/>
               <a:t>Start</a:t>
             </a:r>
           </a:p>
@@ -4262,7 +4249,7 @@
           <a:lstStyle/>
           <a:p>
             <a:r>
-              <a:rPr lang="nl-NL" dirty="0"/>
+              <a:rPr lang="nl-NL"/>
               <a:t>Einde</a:t>
             </a:r>
           </a:p>
@@ -4297,7 +4284,7 @@
           <a:lstStyle/>
           <a:p>
             <a:r>
-              <a:rPr lang="nl-NL" sz="900" dirty="0" err="1">
+              <a:rPr lang="nl-NL" sz="900" err="1">
                 <a:solidFill>
                   <a:schemeClr val="bg1"/>
                 </a:solidFill>
@@ -4305,7 +4292,7 @@
               <a:t>Csv</a:t>
             </a:r>
             <a:r>
-              <a:rPr lang="nl-NL" sz="900" dirty="0">
+              <a:rPr lang="nl-NL" sz="900">
                 <a:solidFill>
                   <a:schemeClr val="bg1"/>
                 </a:solidFill>
@@ -4313,7 +4300,7 @@
               <a:t> &amp; </a:t>
             </a:r>
             <a:r>
-              <a:rPr lang="nl-NL" sz="900" dirty="0" err="1">
+              <a:rPr lang="nl-NL" sz="900" err="1">
                 <a:solidFill>
                   <a:schemeClr val="bg1"/>
                 </a:solidFill>
@@ -4321,7 +4308,7 @@
               <a:t>json</a:t>
             </a:r>
             <a:r>
-              <a:rPr lang="nl-NL" sz="900" dirty="0">
+              <a:rPr lang="nl-NL" sz="900">
                 <a:solidFill>
                   <a:schemeClr val="bg1"/>
                 </a:solidFill>
@@ -4331,7 +4318,7 @@
           </a:p>
           <a:p>
             <a:r>
-              <a:rPr lang="nl-NL" sz="600" dirty="0" err="1">
+              <a:rPr lang="nl-NL" sz="600" err="1">
                 <a:solidFill>
                   <a:schemeClr val="bg1"/>
                 </a:solidFill>
@@ -4339,7 +4326,7 @@
               <a:t>Filename</a:t>
             </a:r>
             <a:r>
-              <a:rPr lang="nl-NL" sz="600" dirty="0">
+              <a:rPr lang="nl-NL" sz="600">
                 <a:solidFill>
                   <a:schemeClr val="bg1"/>
                 </a:solidFill>
@@ -4348,7 +4335,7 @@
             </a:r>
           </a:p>
           <a:p>
-            <a:endParaRPr lang="nl-NL" sz="600" dirty="0">
+            <a:endParaRPr lang="nl-NL" sz="600">
               <a:solidFill>
                 <a:schemeClr val="bg1"/>
               </a:solidFill>
@@ -4356,7 +4343,7 @@
           </a:p>
           <a:p>
             <a:r>
-              <a:rPr lang="nl-NL" sz="600" dirty="0">
+              <a:rPr lang="nl-NL" sz="600">
                 <a:solidFill>
                   <a:schemeClr val="bg1"/>
                 </a:solidFill>
@@ -4366,7 +4353,7 @@
           </a:p>
           <a:p>
             <a:r>
-              <a:rPr lang="nl-NL" sz="600" dirty="0">
+              <a:rPr lang="nl-NL" sz="600">
                 <a:solidFill>
                   <a:schemeClr val="bg1"/>
                 </a:solidFill>
@@ -4374,7 +4361,7 @@
               <a:t>Afmetingen, tankvullingen, zwaartepunten, center of </a:t>
             </a:r>
             <a:r>
-              <a:rPr lang="nl-NL" sz="600" dirty="0" err="1">
+              <a:rPr lang="nl-NL" sz="600" err="1">
                 <a:solidFill>
                   <a:schemeClr val="bg1"/>
                 </a:solidFill>
@@ -4382,14 +4369,14 @@
               <a:t>areas</a:t>
             </a:r>
             <a:r>
-              <a:rPr lang="nl-NL" sz="600" dirty="0">
+              <a:rPr lang="nl-NL" sz="600">
                 <a:solidFill>
                   <a:schemeClr val="bg1"/>
                 </a:solidFill>
               </a:rPr>
               <a:t>,  displacement data</a:t>
             </a:r>
-            <a:endParaRPr lang="nl-NL" sz="500" dirty="0">
+            <a:endParaRPr lang="nl-NL" sz="500">
               <a:solidFill>
                 <a:schemeClr val="bg1"/>
               </a:solidFill>
@@ -4472,21 +4459,21 @@
           <a:lstStyle/>
           <a:p>
             <a:r>
-              <a:rPr lang="nl-NL" sz="800" dirty="0">
+              <a:rPr lang="nl-NL" sz="800">
                 <a:solidFill>
                   <a:schemeClr val="bg1"/>
                 </a:solidFill>
               </a:rPr>
               <a:t>Importeer inlees functies uit inleesfile</a:t>
             </a:r>
-            <a:endParaRPr lang="nl-NL" sz="400" dirty="0">
+            <a:endParaRPr lang="nl-NL" sz="400">
               <a:solidFill>
                 <a:schemeClr val="bg1"/>
               </a:solidFill>
             </a:endParaRPr>
           </a:p>
           <a:p>
-            <a:endParaRPr lang="nl-NL" sz="400" dirty="0">
+            <a:endParaRPr lang="nl-NL" sz="400">
               <a:solidFill>
                 <a:schemeClr val="bg1"/>
               </a:solidFill>
@@ -4494,7 +4481,7 @@
           </a:p>
           <a:p>
             <a:r>
-              <a:rPr lang="nl-NL" sz="500" dirty="0">
+              <a:rPr lang="nl-NL" sz="500">
                 <a:solidFill>
                   <a:schemeClr val="bg1"/>
                 </a:solidFill>
@@ -4502,7 +4489,7 @@
               <a:t>Functienaam: </a:t>
             </a:r>
             <a:r>
-              <a:rPr lang="nl-NL" sz="500" dirty="0" err="1">
+              <a:rPr lang="nl-NL" sz="500" err="1">
                 <a:solidFill>
                   <a:schemeClr val="bg1"/>
                 </a:solidFill>
@@ -4510,7 +4497,7 @@
               <a:t>readCSVdata</a:t>
             </a:r>
             <a:r>
-              <a:rPr lang="nl-NL" sz="500" dirty="0">
+              <a:rPr lang="nl-NL" sz="500">
                 <a:solidFill>
                   <a:schemeClr val="bg1"/>
                 </a:solidFill>
@@ -4518,14 +4505,14 @@
               <a:t>, </a:t>
             </a:r>
             <a:r>
-              <a:rPr lang="nl-NL" sz="500" dirty="0" err="1">
+              <a:rPr lang="nl-NL" sz="500" err="1">
                 <a:solidFill>
                   <a:schemeClr val="bg1"/>
                 </a:solidFill>
               </a:rPr>
               <a:t>readJSONdata</a:t>
             </a:r>
-            <a:endParaRPr lang="nl-NL" sz="500" dirty="0">
+            <a:endParaRPr lang="nl-NL" sz="500">
               <a:solidFill>
                 <a:schemeClr val="bg1"/>
               </a:solidFill>
@@ -4533,7 +4520,7 @@
           </a:p>
           <a:p>
             <a:r>
-              <a:rPr lang="nl-NL" sz="500" dirty="0">
+              <a:rPr lang="nl-NL" sz="500">
                 <a:solidFill>
                   <a:schemeClr val="bg1"/>
                 </a:solidFill>
@@ -4543,7 +4530,7 @@
           </a:p>
           <a:p>
             <a:r>
-              <a:rPr lang="nl-NL" sz="500" dirty="0">
+              <a:rPr lang="nl-NL" sz="500">
                 <a:solidFill>
                   <a:schemeClr val="bg1"/>
                 </a:solidFill>
@@ -4551,7 +4538,7 @@
               <a:t>Return: </a:t>
             </a:r>
             <a:r>
-              <a:rPr lang="nl-NL" sz="500" dirty="0" err="1">
+              <a:rPr lang="nl-NL" sz="500" err="1">
                 <a:solidFill>
                   <a:schemeClr val="bg1"/>
                 </a:solidFill>
@@ -4559,7 +4546,7 @@
               <a:t>float</a:t>
             </a:r>
             <a:r>
-              <a:rPr lang="nl-NL" sz="500" dirty="0">
+              <a:rPr lang="nl-NL" sz="500">
                 <a:solidFill>
                   <a:schemeClr val="bg1"/>
                 </a:solidFill>
@@ -4567,7 +4554,7 @@
               <a:t>/integer (waarde uit </a:t>
             </a:r>
             <a:r>
-              <a:rPr lang="nl-NL" sz="500" dirty="0" err="1">
+              <a:rPr lang="nl-NL" sz="500" err="1">
                 <a:solidFill>
                   <a:schemeClr val="bg1"/>
                 </a:solidFill>
@@ -4575,7 +4562,7 @@
               <a:t>csv</a:t>
             </a:r>
             <a:r>
-              <a:rPr lang="nl-NL" sz="500" dirty="0">
+              <a:rPr lang="nl-NL" sz="500">
                 <a:solidFill>
                   <a:schemeClr val="bg1"/>
                 </a:solidFill>
@@ -4583,7 +4570,7 @@
               <a:t> of </a:t>
             </a:r>
             <a:r>
-              <a:rPr lang="nl-NL" sz="500" dirty="0" err="1">
+              <a:rPr lang="nl-NL" sz="500" err="1">
                 <a:solidFill>
                   <a:schemeClr val="bg1"/>
                 </a:solidFill>
@@ -4591,7 +4578,7 @@
               <a:t>json</a:t>
             </a:r>
             <a:r>
-              <a:rPr lang="nl-NL" sz="500" dirty="0">
+              <a:rPr lang="nl-NL" sz="500">
                 <a:solidFill>
                   <a:schemeClr val="bg1"/>
                 </a:solidFill>
@@ -4772,7 +4759,7 @@
           <a:lstStyle/>
           <a:p>
             <a:r>
-              <a:rPr lang="nl-NL" sz="400" dirty="0">
+              <a:rPr lang="nl-NL" sz="400">
                 <a:solidFill>
                   <a:schemeClr val="bg1"/>
                 </a:solidFill>
@@ -4780,7 +4767,7 @@
               <a:t>Aanroepen Class </a:t>
             </a:r>
             <a:r>
-              <a:rPr lang="nl-NL" sz="400" dirty="0" err="1">
+              <a:rPr lang="nl-NL" sz="400" err="1">
                 <a:solidFill>
                   <a:schemeClr val="bg1"/>
                 </a:solidFill>
@@ -4788,7 +4775,7 @@
               <a:t>Ship</a:t>
             </a:r>
             <a:r>
-              <a:rPr lang="nl-NL" sz="400" dirty="0">
+              <a:rPr lang="nl-NL" sz="400">
                 <a:solidFill>
                   <a:schemeClr val="bg1"/>
                 </a:solidFill>
@@ -4959,7 +4946,7 @@
           <a:lstStyle/>
           <a:p>
             <a:r>
-              <a:rPr lang="nl-NL" sz="400" dirty="0">
+              <a:rPr lang="nl-NL" sz="400">
                 <a:solidFill>
                   <a:schemeClr val="bg1"/>
                 </a:solidFill>
@@ -4998,7 +4985,7 @@
           <a:lstStyle/>
           <a:p>
             <a:r>
-              <a:rPr lang="nl-NL" sz="400" dirty="0">
+              <a:rPr lang="nl-NL" sz="400">
                 <a:solidFill>
                   <a:schemeClr val="bg1"/>
                 </a:solidFill>
@@ -5083,7 +5070,7 @@
           <a:lstStyle/>
           <a:p>
             <a:r>
-              <a:rPr lang="nl-NL" sz="600" dirty="0">
+              <a:rPr lang="nl-NL" sz="600">
                 <a:solidFill>
                   <a:schemeClr val="bg1"/>
                 </a:solidFill>
@@ -5091,7 +5078,7 @@
               <a:t>Output </a:t>
             </a:r>
             <a:r>
-              <a:rPr lang="nl-NL" sz="600" dirty="0" err="1">
+              <a:rPr lang="nl-NL" sz="600" err="1">
                 <a:solidFill>
                   <a:schemeClr val="bg1"/>
                 </a:solidFill>
@@ -5099,11 +5086,11 @@
               <a:t>documents</a:t>
             </a:r>
             <a:r>
-              <a:rPr lang="nl-NL" sz="600" dirty="0"/>
+              <a:rPr lang="nl-NL" sz="600"/>
               <a:t>: </a:t>
             </a:r>
             <a:r>
-              <a:rPr lang="nl-NL" sz="600" dirty="0">
+              <a:rPr lang="nl-NL" sz="600">
                 <a:solidFill>
                   <a:schemeClr val="bg1"/>
                 </a:solidFill>
@@ -5113,7 +5100,7 @@
           </a:p>
           <a:p>
             <a:r>
-              <a:rPr lang="nl-NL" sz="600" dirty="0">
+              <a:rPr lang="nl-NL" sz="600">
                 <a:solidFill>
                   <a:schemeClr val="bg1"/>
                 </a:solidFill>
@@ -5122,7 +5109,7 @@
             </a:r>
           </a:p>
           <a:p>
-            <a:endParaRPr lang="nl-NL" sz="600" dirty="0">
+            <a:endParaRPr lang="nl-NL" sz="600">
               <a:solidFill>
                 <a:schemeClr val="bg1"/>
               </a:solidFill>
@@ -5293,45 +5280,45 @@
           <a:lstStyle/>
           <a:p>
             <a:r>
-              <a:rPr lang="nl-NL" sz="700" dirty="0" err="1"/>
+              <a:rPr lang="nl-NL" sz="700" err="1"/>
               <a:t>Class:tank</a:t>
             </a:r>
-            <a:endParaRPr lang="nl-NL" sz="700" dirty="0"/>
-          </a:p>
-          <a:p>
-            <a:endParaRPr lang="nl-NL" sz="700" dirty="0"/>
-          </a:p>
-          <a:p>
-            <a:r>
-              <a:rPr lang="nl-NL" sz="700" dirty="0"/>
+            <a:endParaRPr lang="nl-NL" sz="700"/>
+          </a:p>
+          <a:p>
+            <a:endParaRPr lang="nl-NL" sz="700"/>
+          </a:p>
+          <a:p>
+            <a:r>
+              <a:rPr lang="nl-NL" sz="700"/>
               <a:t>Input: ( </a:t>
             </a:r>
             <a:r>
-              <a:rPr lang="nl-NL" sz="700" dirty="0" err="1"/>
+              <a:rPr lang="nl-NL" sz="700" err="1"/>
               <a:t>tankVolume</a:t>
             </a:r>
             <a:r>
-              <a:rPr lang="nl-NL" sz="700" dirty="0"/>
+              <a:rPr lang="nl-NL" sz="700"/>
               <a:t> diagram, </a:t>
             </a:r>
             <a:r>
-              <a:rPr lang="nl-NL" sz="700" dirty="0" err="1"/>
+              <a:rPr lang="nl-NL" sz="700" err="1"/>
               <a:t>Tankwaterplanes</a:t>
             </a:r>
             <a:r>
-              <a:rPr lang="nl-NL" sz="700" dirty="0"/>
+              <a:rPr lang="nl-NL" sz="700"/>
               <a:t> diagram, )</a:t>
             </a:r>
           </a:p>
           <a:p>
-            <a:endParaRPr lang="nl-NL" sz="700" dirty="0"/>
-          </a:p>
-          <a:p>
-            <a:r>
-              <a:rPr lang="nl-NL" sz="700" dirty="0"/>
+            <a:endParaRPr lang="nl-NL" sz="700"/>
+          </a:p>
+          <a:p>
+            <a:r>
+              <a:rPr lang="nl-NL" sz="700"/>
               <a:t>Output: Alle benodigde Tankdata</a:t>
             </a:r>
-            <a:endParaRPr lang="nl-NL" dirty="0"/>
+            <a:endParaRPr lang="nl-NL"/>
           </a:p>
         </p:txBody>
       </p:sp>
@@ -5380,38 +5367,38 @@
           <a:lstStyle/>
           <a:p>
             <a:r>
-              <a:rPr lang="nl-NL" sz="800" dirty="0"/>
+              <a:rPr lang="nl-NL" sz="800"/>
               <a:t>Inleesfile</a:t>
             </a:r>
           </a:p>
           <a:p>
-            <a:endParaRPr lang="nl-NL" sz="800" dirty="0"/>
-          </a:p>
-          <a:p>
-            <a:r>
-              <a:rPr lang="nl-NL" sz="800" dirty="0"/>
+            <a:endParaRPr lang="nl-NL" sz="800"/>
+          </a:p>
+          <a:p>
+            <a:r>
+              <a:rPr lang="nl-NL" sz="800"/>
               <a:t>Input:(files)</a:t>
             </a:r>
           </a:p>
           <a:p>
-            <a:endParaRPr lang="nl-NL" sz="800" dirty="0"/>
-          </a:p>
-          <a:p>
-            <a:r>
-              <a:rPr lang="nl-NL" sz="800" dirty="0"/>
+            <a:endParaRPr lang="nl-NL" sz="800"/>
+          </a:p>
+          <a:p>
+            <a:r>
+              <a:rPr lang="nl-NL" sz="800"/>
               <a:t>Output:(Alle losse files en hun waardes)</a:t>
             </a:r>
           </a:p>
           <a:p>
-            <a:endParaRPr lang="nl-NL" sz="800" dirty="0"/>
+            <a:endParaRPr lang="nl-NL" sz="800"/>
           </a:p>
           <a:p>
             <a:pPr algn="ctr"/>
-            <a:endParaRPr lang="nl-NL" sz="800" dirty="0"/>
+            <a:endParaRPr lang="nl-NL" sz="800"/>
           </a:p>
           <a:p>
             <a:pPr algn="ctr"/>
-            <a:endParaRPr lang="nl-NL" sz="800" dirty="0"/>
+            <a:endParaRPr lang="nl-NL" sz="800"/>
           </a:p>
         </p:txBody>
       </p:sp>
@@ -5459,7 +5446,7 @@
           <a:bodyPr rtlCol="0" anchor="ctr"/>
           <a:lstStyle/>
           <a:p>
-            <a:endParaRPr lang="nl-NL" sz="800" dirty="0"/>
+            <a:endParaRPr lang="nl-NL" sz="800"/>
           </a:p>
         </p:txBody>
       </p:sp>

--- a/Flowcharts/flowchart I&V.pptx
+++ b/Flowcharts/flowchart I&V.pptx
@@ -109,6 +109,14 @@
     </a:lvl9pPr>
   </p:defaultTextStyle>
 </p:presentation>
+</file>
+
+<file path=ppt/revisionInfo.xml><?xml version="1.0" encoding="utf-8"?>
+<p1510:revInfo xmlns:a="http://schemas.openxmlformats.org/drawingml/2006/main" xmlns:r="http://schemas.openxmlformats.org/officeDocument/2006/relationships" xmlns:p1510="http://schemas.microsoft.com/office/powerpoint/2015/10/main">
+  <p1510:revLst>
+    <p1510:client id="{8D00378C-A75F-E69D-1EFD-860055A5C78E}" v="2" dt="2026-03-02T14:51:16.432"/>
+  </p1510:revLst>
+</p1510:revInfo>
 </file>
 
 <file path=ppt/changesInfos/changesInfo1.xml><?xml version="1.0" encoding="utf-8"?>
@@ -240,6 +248,38 @@
       </pc:sldChg>
     </pc:docChg>
   </pc:docChgLst>
+  <pc:docChgLst>
+    <pc:chgData name="Jasper Mulder" userId="S::jkmulder@tudelft.nl::0dd8af4c-5813-4b75-95ce-10a3d81a5b3a" providerId="AD" clId="Web-{8D00378C-A75F-E69D-1EFD-860055A5C78E}"/>
+    <pc:docChg chg="modSld">
+      <pc:chgData name="Jasper Mulder" userId="S::jkmulder@tudelft.nl::0dd8af4c-5813-4b75-95ce-10a3d81a5b3a" providerId="AD" clId="Web-{8D00378C-A75F-E69D-1EFD-860055A5C78E}" dt="2026-03-02T14:51:16.432" v="1" actId="1076"/>
+      <pc:docMkLst>
+        <pc:docMk/>
+      </pc:docMkLst>
+      <pc:sldChg chg="modSp">
+        <pc:chgData name="Jasper Mulder" userId="S::jkmulder@tudelft.nl::0dd8af4c-5813-4b75-95ce-10a3d81a5b3a" providerId="AD" clId="Web-{8D00378C-A75F-E69D-1EFD-860055A5C78E}" dt="2026-03-02T14:51:16.432" v="1" actId="1076"/>
+        <pc:sldMkLst>
+          <pc:docMk/>
+          <pc:sldMk cId="168350686" sldId="256"/>
+        </pc:sldMkLst>
+        <pc:spChg chg="mod">
+          <ac:chgData name="Jasper Mulder" userId="S::jkmulder@tudelft.nl::0dd8af4c-5813-4b75-95ce-10a3d81a5b3a" providerId="AD" clId="Web-{8D00378C-A75F-E69D-1EFD-860055A5C78E}" dt="2026-03-02T14:51:07.354" v="0" actId="1076"/>
+          <ac:spMkLst>
+            <pc:docMk/>
+            <pc:sldMk cId="168350686" sldId="256"/>
+            <ac:spMk id="6" creationId="{4208EE6E-459A-2BD6-88F5-25BE6F9D7099}"/>
+          </ac:spMkLst>
+        </pc:spChg>
+        <pc:spChg chg="mod">
+          <ac:chgData name="Jasper Mulder" userId="S::jkmulder@tudelft.nl::0dd8af4c-5813-4b75-95ce-10a3d81a5b3a" providerId="AD" clId="Web-{8D00378C-A75F-E69D-1EFD-860055A5C78E}" dt="2026-03-02T14:51:16.432" v="1" actId="1076"/>
+          <ac:spMkLst>
+            <pc:docMk/>
+            <pc:sldMk cId="168350686" sldId="256"/>
+            <ac:spMk id="13" creationId="{0FD4395A-4374-5AF2-5359-F6534FA3F331}"/>
+          </ac:spMkLst>
+        </pc:spChg>
+      </pc:sldChg>
+    </pc:docChg>
+  </pc:docChgLst>
 </pc:chgInfo>
 </file>
 
@@ -325,7 +365,7 @@
           <a:p>
             <a:fld id="{527883EE-8E19-4C44-9477-790D07DE6C39}" type="datetimeFigureOut">
               <a:rPr lang="nl-NL" smtClean="0"/>
-              <a:t>23-2-2026</a:t>
+              <a:t>2-3-2026</a:t>
             </a:fld>
             <a:endParaRPr lang="nl-NL"/>
           </a:p>
@@ -823,7 +863,7 @@
           <a:p>
             <a:fld id="{1AC29ED6-F496-4EC6-873F-F305C5846261}" type="datetimeFigureOut">
               <a:rPr lang="nl-NL" smtClean="0"/>
-              <a:t>23-2-2026</a:t>
+              <a:t>2-3-2026</a:t>
             </a:fld>
             <a:endParaRPr lang="nl-NL"/>
           </a:p>
@@ -1021,7 +1061,7 @@
           <a:p>
             <a:fld id="{1AC29ED6-F496-4EC6-873F-F305C5846261}" type="datetimeFigureOut">
               <a:rPr lang="nl-NL" smtClean="0"/>
-              <a:t>23-2-2026</a:t>
+              <a:t>2-3-2026</a:t>
             </a:fld>
             <a:endParaRPr lang="nl-NL"/>
           </a:p>
@@ -1229,7 +1269,7 @@
           <a:p>
             <a:fld id="{1AC29ED6-F496-4EC6-873F-F305C5846261}" type="datetimeFigureOut">
               <a:rPr lang="nl-NL" smtClean="0"/>
-              <a:t>23-2-2026</a:t>
+              <a:t>2-3-2026</a:t>
             </a:fld>
             <a:endParaRPr lang="nl-NL"/>
           </a:p>
@@ -1427,7 +1467,7 @@
           <a:p>
             <a:fld id="{1AC29ED6-F496-4EC6-873F-F305C5846261}" type="datetimeFigureOut">
               <a:rPr lang="nl-NL" smtClean="0"/>
-              <a:t>23-2-2026</a:t>
+              <a:t>2-3-2026</a:t>
             </a:fld>
             <a:endParaRPr lang="nl-NL"/>
           </a:p>
@@ -1702,7 +1742,7 @@
           <a:p>
             <a:fld id="{1AC29ED6-F496-4EC6-873F-F305C5846261}" type="datetimeFigureOut">
               <a:rPr lang="nl-NL" smtClean="0"/>
-              <a:t>23-2-2026</a:t>
+              <a:t>2-3-2026</a:t>
             </a:fld>
             <a:endParaRPr lang="nl-NL"/>
           </a:p>
@@ -1967,7 +2007,7 @@
           <a:p>
             <a:fld id="{1AC29ED6-F496-4EC6-873F-F305C5846261}" type="datetimeFigureOut">
               <a:rPr lang="nl-NL" smtClean="0"/>
-              <a:t>23-2-2026</a:t>
+              <a:t>2-3-2026</a:t>
             </a:fld>
             <a:endParaRPr lang="nl-NL"/>
           </a:p>
@@ -2379,7 +2419,7 @@
           <a:p>
             <a:fld id="{1AC29ED6-F496-4EC6-873F-F305C5846261}" type="datetimeFigureOut">
               <a:rPr lang="nl-NL" smtClean="0"/>
-              <a:t>23-2-2026</a:t>
+              <a:t>2-3-2026</a:t>
             </a:fld>
             <a:endParaRPr lang="nl-NL"/>
           </a:p>
@@ -2520,7 +2560,7 @@
           <a:p>
             <a:fld id="{1AC29ED6-F496-4EC6-873F-F305C5846261}" type="datetimeFigureOut">
               <a:rPr lang="nl-NL" smtClean="0"/>
-              <a:t>23-2-2026</a:t>
+              <a:t>2-3-2026</a:t>
             </a:fld>
             <a:endParaRPr lang="nl-NL"/>
           </a:p>
@@ -2633,7 +2673,7 @@
           <a:p>
             <a:fld id="{1AC29ED6-F496-4EC6-873F-F305C5846261}" type="datetimeFigureOut">
               <a:rPr lang="nl-NL" smtClean="0"/>
-              <a:t>23-2-2026</a:t>
+              <a:t>2-3-2026</a:t>
             </a:fld>
             <a:endParaRPr lang="nl-NL"/>
           </a:p>
@@ -2944,7 +2984,7 @@
           <a:p>
             <a:fld id="{1AC29ED6-F496-4EC6-873F-F305C5846261}" type="datetimeFigureOut">
               <a:rPr lang="nl-NL" smtClean="0"/>
-              <a:t>23-2-2026</a:t>
+              <a:t>2-3-2026</a:t>
             </a:fld>
             <a:endParaRPr lang="nl-NL"/>
           </a:p>
@@ -3232,7 +3272,7 @@
           <a:p>
             <a:fld id="{1AC29ED6-F496-4EC6-873F-F305C5846261}" type="datetimeFigureOut">
               <a:rPr lang="nl-NL" smtClean="0"/>
-              <a:t>23-2-2026</a:t>
+              <a:t>2-3-2026</a:t>
             </a:fld>
             <a:endParaRPr lang="nl-NL"/>
           </a:p>
@@ -3473,7 +3513,7 @@
           <a:p>
             <a:fld id="{1AC29ED6-F496-4EC6-873F-F305C5846261}" type="datetimeFigureOut">
               <a:rPr lang="nl-NL" smtClean="0"/>
-              <a:t>23-2-2026</a:t>
+              <a:t>2-3-2026</a:t>
             </a:fld>
             <a:endParaRPr lang="nl-NL"/>
           </a:p>
@@ -3953,7 +3993,7 @@
         </p:nvSpPr>
         <p:spPr>
           <a:xfrm>
-            <a:off x="4287417" y="369492"/>
+            <a:off x="4278124" y="7077"/>
             <a:ext cx="1632857" cy="624736"/>
           </a:xfrm>
           <a:prstGeom prst="flowChartTerminator">
@@ -4199,7 +4239,7 @@
         </p:nvSpPr>
         <p:spPr>
           <a:xfrm>
-            <a:off x="4725956" y="497194"/>
+            <a:off x="4725956" y="134779"/>
             <a:ext cx="1194318" cy="369332"/>
           </a:xfrm>
           <a:prstGeom prst="rect">

--- a/Flowcharts/flowchart I&V.pptx
+++ b/Flowcharts/flowchart I&V.pptx
@@ -114,7 +114,7 @@
 <file path=ppt/revisionInfo.xml><?xml version="1.0" encoding="utf-8"?>
 <p1510:revInfo xmlns:a="http://schemas.openxmlformats.org/drawingml/2006/main" xmlns:r="http://schemas.openxmlformats.org/officeDocument/2006/relationships" xmlns:p1510="http://schemas.microsoft.com/office/powerpoint/2015/10/main">
   <p1510:revLst>
-    <p1510:client id="{8D00378C-A75F-E69D-1EFD-860055A5C78E}" v="2" dt="2026-03-02T14:51:16.432"/>
+    <p1510:client id="{8D00378C-A75F-E69D-1EFD-860055A5C78E}" v="64" dt="2026-03-02T15:06:35.120"/>
   </p1510:revLst>
 </p1510:revInfo>
 </file>
@@ -251,22 +251,38 @@
   <pc:docChgLst>
     <pc:chgData name="Jasper Mulder" userId="S::jkmulder@tudelft.nl::0dd8af4c-5813-4b75-95ce-10a3d81a5b3a" providerId="AD" clId="Web-{8D00378C-A75F-E69D-1EFD-860055A5C78E}"/>
     <pc:docChg chg="modSld">
-      <pc:chgData name="Jasper Mulder" userId="S::jkmulder@tudelft.nl::0dd8af4c-5813-4b75-95ce-10a3d81a5b3a" providerId="AD" clId="Web-{8D00378C-A75F-E69D-1EFD-860055A5C78E}" dt="2026-03-02T14:51:16.432" v="1" actId="1076"/>
+      <pc:chgData name="Jasper Mulder" userId="S::jkmulder@tudelft.nl::0dd8af4c-5813-4b75-95ce-10a3d81a5b3a" providerId="AD" clId="Web-{8D00378C-A75F-E69D-1EFD-860055A5C78E}" dt="2026-03-02T15:06:35.120" v="48" actId="1076"/>
       <pc:docMkLst>
         <pc:docMk/>
       </pc:docMkLst>
       <pc:sldChg chg="modSp">
-        <pc:chgData name="Jasper Mulder" userId="S::jkmulder@tudelft.nl::0dd8af4c-5813-4b75-95ce-10a3d81a5b3a" providerId="AD" clId="Web-{8D00378C-A75F-E69D-1EFD-860055A5C78E}" dt="2026-03-02T14:51:16.432" v="1" actId="1076"/>
+        <pc:chgData name="Jasper Mulder" userId="S::jkmulder@tudelft.nl::0dd8af4c-5813-4b75-95ce-10a3d81a5b3a" providerId="AD" clId="Web-{8D00378C-A75F-E69D-1EFD-860055A5C78E}" dt="2026-03-02T15:06:35.120" v="48" actId="1076"/>
         <pc:sldMkLst>
           <pc:docMk/>
           <pc:sldMk cId="168350686" sldId="256"/>
         </pc:sldMkLst>
+        <pc:spChg chg="mod">
+          <ac:chgData name="Jasper Mulder" userId="S::jkmulder@tudelft.nl::0dd8af4c-5813-4b75-95ce-10a3d81a5b3a" providerId="AD" clId="Web-{8D00378C-A75F-E69D-1EFD-860055A5C78E}" dt="2026-03-02T14:52:05.653" v="9" actId="1076"/>
+          <ac:spMkLst>
+            <pc:docMk/>
+            <pc:sldMk cId="168350686" sldId="256"/>
+            <ac:spMk id="4" creationId="{2BC853D3-4F1D-CEC9-2234-90ED7A7F10A3}"/>
+          </ac:spMkLst>
+        </pc:spChg>
         <pc:spChg chg="mod">
           <ac:chgData name="Jasper Mulder" userId="S::jkmulder@tudelft.nl::0dd8af4c-5813-4b75-95ce-10a3d81a5b3a" providerId="AD" clId="Web-{8D00378C-A75F-E69D-1EFD-860055A5C78E}" dt="2026-03-02T14:51:07.354" v="0" actId="1076"/>
           <ac:spMkLst>
             <pc:docMk/>
             <pc:sldMk cId="168350686" sldId="256"/>
             <ac:spMk id="6" creationId="{4208EE6E-459A-2BD6-88F5-25BE6F9D7099}"/>
+          </ac:spMkLst>
+        </pc:spChg>
+        <pc:spChg chg="mod">
+          <ac:chgData name="Jasper Mulder" userId="S::jkmulder@tudelft.nl::0dd8af4c-5813-4b75-95ce-10a3d81a5b3a" providerId="AD" clId="Web-{8D00378C-A75F-E69D-1EFD-860055A5C78E}" dt="2026-03-02T15:06:34.870" v="37" actId="1076"/>
+          <ac:spMkLst>
+            <pc:docMk/>
+            <pc:sldMk cId="168350686" sldId="256"/>
+            <ac:spMk id="8" creationId="{2ABC436A-8FB4-15AA-3182-DE8115F4898B}"/>
           </ac:spMkLst>
         </pc:spChg>
         <pc:spChg chg="mod">
@@ -277,6 +293,142 @@
             <ac:spMk id="13" creationId="{0FD4395A-4374-5AF2-5359-F6534FA3F331}"/>
           </ac:spMkLst>
         </pc:spChg>
+        <pc:spChg chg="mod">
+          <ac:chgData name="Jasper Mulder" userId="S::jkmulder@tudelft.nl::0dd8af4c-5813-4b75-95ce-10a3d81a5b3a" providerId="AD" clId="Web-{8D00378C-A75F-E69D-1EFD-860055A5C78E}" dt="2026-03-02T14:53:37.848" v="36" actId="20577"/>
+          <ac:spMkLst>
+            <pc:docMk/>
+            <pc:sldMk cId="168350686" sldId="256"/>
+            <ac:spMk id="16" creationId="{FC691296-90FE-7B80-0232-D1A0455D988F}"/>
+          </ac:spMkLst>
+        </pc:spChg>
+        <pc:spChg chg="mod">
+          <ac:chgData name="Jasper Mulder" userId="S::jkmulder@tudelft.nl::0dd8af4c-5813-4b75-95ce-10a3d81a5b3a" providerId="AD" clId="Web-{8D00378C-A75F-E69D-1EFD-860055A5C78E}" dt="2026-03-02T14:51:54.886" v="6" actId="1076"/>
+          <ac:spMkLst>
+            <pc:docMk/>
+            <pc:sldMk cId="168350686" sldId="256"/>
+            <ac:spMk id="18" creationId="{497652A3-4E2C-2133-D839-A1AC5ADA4A78}"/>
+          </ac:spMkLst>
+        </pc:spChg>
+        <pc:spChg chg="mod">
+          <ac:chgData name="Jasper Mulder" userId="S::jkmulder@tudelft.nl::0dd8af4c-5813-4b75-95ce-10a3d81a5b3a" providerId="AD" clId="Web-{8D00378C-A75F-E69D-1EFD-860055A5C78E}" dt="2026-03-02T14:51:54.902" v="7" actId="1076"/>
+          <ac:spMkLst>
+            <pc:docMk/>
+            <pc:sldMk cId="168350686" sldId="256"/>
+            <ac:spMk id="19" creationId="{1C45C52E-2619-D0A1-350F-95772F08C124}"/>
+          </ac:spMkLst>
+        </pc:spChg>
+        <pc:spChg chg="mod">
+          <ac:chgData name="Jasper Mulder" userId="S::jkmulder@tudelft.nl::0dd8af4c-5813-4b75-95ce-10a3d81a5b3a" providerId="AD" clId="Web-{8D00378C-A75F-E69D-1EFD-860055A5C78E}" dt="2026-03-02T15:06:34.901" v="38" actId="1076"/>
+          <ac:spMkLst>
+            <pc:docMk/>
+            <pc:sldMk cId="168350686" sldId="256"/>
+            <ac:spMk id="26" creationId="{7B706E7C-64BA-2F10-3011-7130A54282CD}"/>
+          </ac:spMkLst>
+        </pc:spChg>
+        <pc:spChg chg="mod">
+          <ac:chgData name="Jasper Mulder" userId="S::jkmulder@tudelft.nl::0dd8af4c-5813-4b75-95ce-10a3d81a5b3a" providerId="AD" clId="Web-{8D00378C-A75F-E69D-1EFD-860055A5C78E}" dt="2026-03-02T15:06:34.933" v="39" actId="1076"/>
+          <ac:spMkLst>
+            <pc:docMk/>
+            <pc:sldMk cId="168350686" sldId="256"/>
+            <ac:spMk id="27" creationId="{96C21054-989B-B328-ABEF-0029917C5A75}"/>
+          </ac:spMkLst>
+        </pc:spChg>
+        <pc:spChg chg="mod">
+          <ac:chgData name="Jasper Mulder" userId="S::jkmulder@tudelft.nl::0dd8af4c-5813-4b75-95ce-10a3d81a5b3a" providerId="AD" clId="Web-{8D00378C-A75F-E69D-1EFD-860055A5C78E}" dt="2026-03-02T15:06:34.964" v="40" actId="1076"/>
+          <ac:spMkLst>
+            <pc:docMk/>
+            <pc:sldMk cId="168350686" sldId="256"/>
+            <ac:spMk id="29" creationId="{D2EA300E-DDED-09B5-E16E-30256819D54F}"/>
+          </ac:spMkLst>
+        </pc:spChg>
+        <pc:spChg chg="mod">
+          <ac:chgData name="Jasper Mulder" userId="S::jkmulder@tudelft.nl::0dd8af4c-5813-4b75-95ce-10a3d81a5b3a" providerId="AD" clId="Web-{8D00378C-A75F-E69D-1EFD-860055A5C78E}" dt="2026-03-02T15:06:35.018" v="43" actId="1076"/>
+          <ac:spMkLst>
+            <pc:docMk/>
+            <pc:sldMk cId="168350686" sldId="256"/>
+            <ac:spMk id="33" creationId="{BD4C2E2D-4773-C9FA-1038-CFC435F39E4E}"/>
+          </ac:spMkLst>
+        </pc:spChg>
+        <pc:spChg chg="mod">
+          <ac:chgData name="Jasper Mulder" userId="S::jkmulder@tudelft.nl::0dd8af4c-5813-4b75-95ce-10a3d81a5b3a" providerId="AD" clId="Web-{8D00378C-A75F-E69D-1EFD-860055A5C78E}" dt="2026-03-02T15:06:35.026" v="44" actId="1076"/>
+          <ac:spMkLst>
+            <pc:docMk/>
+            <pc:sldMk cId="168350686" sldId="256"/>
+            <ac:spMk id="34" creationId="{512BDE7B-090F-D024-973D-C59BDAD724C3}"/>
+          </ac:spMkLst>
+        </pc:spChg>
+        <pc:spChg chg="mod">
+          <ac:chgData name="Jasper Mulder" userId="S::jkmulder@tudelft.nl::0dd8af4c-5813-4b75-95ce-10a3d81a5b3a" providerId="AD" clId="Web-{8D00378C-A75F-E69D-1EFD-860055A5C78E}" dt="2026-03-02T15:06:35.058" v="45" actId="1076"/>
+          <ac:spMkLst>
+            <pc:docMk/>
+            <pc:sldMk cId="168350686" sldId="256"/>
+            <ac:spMk id="37" creationId="{427C294B-E904-3172-3681-F4DF02A7940C}"/>
+          </ac:spMkLst>
+        </pc:spChg>
+        <pc:spChg chg="mod">
+          <ac:chgData name="Jasper Mulder" userId="S::jkmulder@tudelft.nl::0dd8af4c-5813-4b75-95ce-10a3d81a5b3a" providerId="AD" clId="Web-{8D00378C-A75F-E69D-1EFD-860055A5C78E}" dt="2026-03-02T15:06:35.089" v="46" actId="1076"/>
+          <ac:spMkLst>
+            <pc:docMk/>
+            <pc:sldMk cId="168350686" sldId="256"/>
+            <ac:spMk id="38" creationId="{8E75A567-86CC-19E9-06BF-65DEAD884672}"/>
+          </ac:spMkLst>
+        </pc:spChg>
+        <pc:cxnChg chg="mod">
+          <ac:chgData name="Jasper Mulder" userId="S::jkmulder@tudelft.nl::0dd8af4c-5813-4b75-95ce-10a3d81a5b3a" providerId="AD" clId="Web-{8D00378C-A75F-E69D-1EFD-860055A5C78E}" dt="2026-03-02T14:51:54.871" v="5" actId="1076"/>
+          <ac:cxnSpMkLst>
+            <pc:docMk/>
+            <pc:sldMk cId="168350686" sldId="256"/>
+            <ac:cxnSpMk id="11" creationId="{90923A81-D047-D348-DA34-FC732CE7D4C9}"/>
+          </ac:cxnSpMkLst>
+        </pc:cxnChg>
+        <pc:cxnChg chg="mod">
+          <ac:chgData name="Jasper Mulder" userId="S::jkmulder@tudelft.nl::0dd8af4c-5813-4b75-95ce-10a3d81a5b3a" providerId="AD" clId="Web-{8D00378C-A75F-E69D-1EFD-860055A5C78E}" dt="2026-03-02T14:52:05.684" v="11" actId="1076"/>
+          <ac:cxnSpMkLst>
+            <pc:docMk/>
+            <pc:sldMk cId="168350686" sldId="256"/>
+            <ac:cxnSpMk id="20" creationId="{EC7FB5B6-6B8F-0E14-D2FC-5039090328E6}"/>
+          </ac:cxnSpMkLst>
+        </pc:cxnChg>
+        <pc:cxnChg chg="mod">
+          <ac:chgData name="Jasper Mulder" userId="S::jkmulder@tudelft.nl::0dd8af4c-5813-4b75-95ce-10a3d81a5b3a" providerId="AD" clId="Web-{8D00378C-A75F-E69D-1EFD-860055A5C78E}" dt="2026-03-02T14:51:54.918" v="8" actId="1076"/>
+          <ac:cxnSpMkLst>
+            <pc:docMk/>
+            <pc:sldMk cId="168350686" sldId="256"/>
+            <ac:cxnSpMk id="30" creationId="{D8C4542C-C9C9-F8A8-1712-7A648C36B78A}"/>
+          </ac:cxnSpMkLst>
+        </pc:cxnChg>
+        <pc:cxnChg chg="mod">
+          <ac:chgData name="Jasper Mulder" userId="S::jkmulder@tudelft.nl::0dd8af4c-5813-4b75-95ce-10a3d81a5b3a" providerId="AD" clId="Web-{8D00378C-A75F-E69D-1EFD-860055A5C78E}" dt="2026-03-02T15:06:34.964" v="41" actId="1076"/>
+          <ac:cxnSpMkLst>
+            <pc:docMk/>
+            <pc:sldMk cId="168350686" sldId="256"/>
+            <ac:cxnSpMk id="31" creationId="{EF75321C-84A0-F5B4-FFB0-26B2D4DF595F}"/>
+          </ac:cxnSpMkLst>
+        </pc:cxnChg>
+        <pc:cxnChg chg="mod">
+          <ac:chgData name="Jasper Mulder" userId="S::jkmulder@tudelft.nl::0dd8af4c-5813-4b75-95ce-10a3d81a5b3a" providerId="AD" clId="Web-{8D00378C-A75F-E69D-1EFD-860055A5C78E}" dt="2026-03-02T15:06:34.995" v="42" actId="1076"/>
+          <ac:cxnSpMkLst>
+            <pc:docMk/>
+            <pc:sldMk cId="168350686" sldId="256"/>
+            <ac:cxnSpMk id="32" creationId="{F43E4E43-266B-3EE7-A9D7-6E36FB6ADC16}"/>
+          </ac:cxnSpMkLst>
+        </pc:cxnChg>
+        <pc:cxnChg chg="mod">
+          <ac:chgData name="Jasper Mulder" userId="S::jkmulder@tudelft.nl::0dd8af4c-5813-4b75-95ce-10a3d81a5b3a" providerId="AD" clId="Web-{8D00378C-A75F-E69D-1EFD-860055A5C78E}" dt="2026-03-02T15:06:35.089" v="47" actId="1076"/>
+          <ac:cxnSpMkLst>
+            <pc:docMk/>
+            <pc:sldMk cId="168350686" sldId="256"/>
+            <ac:cxnSpMk id="39" creationId="{22217683-2B12-1CD8-2D58-0FC3617EA9AC}"/>
+          </ac:cxnSpMkLst>
+        </pc:cxnChg>
+        <pc:cxnChg chg="mod">
+          <ac:chgData name="Jasper Mulder" userId="S::jkmulder@tudelft.nl::0dd8af4c-5813-4b75-95ce-10a3d81a5b3a" providerId="AD" clId="Web-{8D00378C-A75F-E69D-1EFD-860055A5C78E}" dt="2026-03-02T15:06:35.120" v="48" actId="1076"/>
+          <ac:cxnSpMkLst>
+            <pc:docMk/>
+            <pc:sldMk cId="168350686" sldId="256"/>
+            <ac:cxnSpMk id="41" creationId="{05D356B8-DE4E-12D5-8A2C-F16DBF34B171}"/>
+          </ac:cxnSpMkLst>
+        </pc:cxnChg>
       </pc:sldChg>
     </pc:docChg>
   </pc:docChgLst>
@@ -3944,7 +4096,7 @@
         </p:nvSpPr>
         <p:spPr>
           <a:xfrm>
-            <a:off x="1355007" y="385685"/>
+            <a:off x="946128" y="850320"/>
             <a:ext cx="2005667" cy="624736"/>
           </a:xfrm>
           <a:prstGeom prst="parallelogram">
@@ -4094,7 +4246,7 @@
         </p:nvSpPr>
         <p:spPr>
           <a:xfrm>
-            <a:off x="4411517" y="2166197"/>
+            <a:off x="4430102" y="1971051"/>
             <a:ext cx="1453901" cy="442633"/>
           </a:xfrm>
           <a:prstGeom prst="rect">
@@ -4145,7 +4297,7 @@
         </p:nvCxnSpPr>
         <p:spPr>
           <a:xfrm>
-            <a:off x="5103845" y="994228"/>
+            <a:off x="5085260" y="594643"/>
             <a:ext cx="0" cy="266835"/>
           </a:xfrm>
           <a:prstGeom prst="straightConnector1">
@@ -4309,8 +4461,8 @@
         </p:nvSpPr>
         <p:spPr>
           <a:xfrm>
-            <a:off x="1450328" y="319556"/>
-            <a:ext cx="1619250" cy="692497"/>
+            <a:off x="1041449" y="784191"/>
+            <a:ext cx="1619250" cy="769441"/>
           </a:xfrm>
           <a:prstGeom prst="rect">
             <a:avLst/>
@@ -4318,60 +4470,35 @@
           <a:noFill/>
         </p:spPr>
         <p:txBody>
-          <a:bodyPr wrap="square" rtlCol="0">
+          <a:bodyPr wrap="square" lIns="91440" tIns="45720" rIns="91440" bIns="45720" rtlCol="0" anchor="t">
             <a:spAutoFit/>
           </a:bodyPr>
           <a:lstStyle/>
           <a:p>
             <a:r>
-              <a:rPr lang="nl-NL" sz="900" err="1">
+              <a:rPr lang="nl-NL" sz="700">
+                <a:solidFill>
+                  <a:schemeClr val="bg1"/>
+                </a:solidFill>
+                <a:ea typeface="+mn-lt"/>
+                <a:cs typeface="+mn-lt"/>
+              </a:rPr>
+              <a:t>CSV tankdata &amp; CSV hull / BHD data &amp; JSON main particulars</a:t>
+            </a:r>
+            <a:endParaRPr lang="nl-NL" sz="700">
+              <a:solidFill>
+                <a:schemeClr val="bg1"/>
+              </a:solidFill>
+            </a:endParaRPr>
+          </a:p>
+          <a:p>
+            <a:r>
+              <a:rPr lang="nl-NL" sz="600" dirty="0">
                 <a:solidFill>
                   <a:schemeClr val="bg1"/>
                 </a:solidFill>
               </a:rPr>
-              <a:t>Csv</a:t>
-            </a:r>
-            <a:r>
-              <a:rPr lang="nl-NL" sz="900">
-                <a:solidFill>
-                  <a:schemeClr val="bg1"/>
-                </a:solidFill>
-              </a:rPr>
-              <a:t> &amp; </a:t>
-            </a:r>
-            <a:r>
-              <a:rPr lang="nl-NL" sz="900" err="1">
-                <a:solidFill>
-                  <a:schemeClr val="bg1"/>
-                </a:solidFill>
-              </a:rPr>
-              <a:t>json</a:t>
-            </a:r>
-            <a:r>
-              <a:rPr lang="nl-NL" sz="900">
-                <a:solidFill>
-                  <a:schemeClr val="bg1"/>
-                </a:solidFill>
-              </a:rPr>
-              <a:t>. Files</a:t>
-            </a:r>
-          </a:p>
-          <a:p>
-            <a:r>
-              <a:rPr lang="nl-NL" sz="600" err="1">
-                <a:solidFill>
-                  <a:schemeClr val="bg1"/>
-                </a:solidFill>
-              </a:rPr>
-              <a:t>Filename</a:t>
-            </a:r>
-            <a:r>
-              <a:rPr lang="nl-NL" sz="600">
-                <a:solidFill>
-                  <a:schemeClr val="bg1"/>
-                </a:solidFill>
-              </a:rPr>
-              <a:t>: string</a:t>
+              <a:t>Filename: string</a:t>
             </a:r>
           </a:p>
           <a:p>
@@ -4383,7 +4510,7 @@
           </a:p>
           <a:p>
             <a:r>
-              <a:rPr lang="nl-NL" sz="600">
+              <a:rPr lang="nl-NL" sz="600" dirty="0">
                 <a:solidFill>
                   <a:schemeClr val="bg1"/>
                 </a:solidFill>
@@ -4393,30 +4520,14 @@
           </a:p>
           <a:p>
             <a:r>
-              <a:rPr lang="nl-NL" sz="600">
+              <a:rPr lang="nl-NL" sz="600" dirty="0">
                 <a:solidFill>
                   <a:schemeClr val="bg1"/>
                 </a:solidFill>
               </a:rPr>
-              <a:t>Afmetingen, tankvullingen, zwaartepunten, center of </a:t>
-            </a:r>
-            <a:r>
-              <a:rPr lang="nl-NL" sz="600" err="1">
-                <a:solidFill>
-                  <a:schemeClr val="bg1"/>
-                </a:solidFill>
-              </a:rPr>
-              <a:t>areas</a:t>
-            </a:r>
-            <a:r>
-              <a:rPr lang="nl-NL" sz="600">
-                <a:solidFill>
-                  <a:schemeClr val="bg1"/>
-                </a:solidFill>
-              </a:rPr>
-              <a:t>,  displacement data</a:t>
-            </a:r>
-            <a:endParaRPr lang="nl-NL" sz="500">
+              <a:t>Afmetingen, tankvullingen, zwaartepunten, center of areas,  displacement data</a:t>
+            </a:r>
+            <a:endParaRPr lang="nl-NL" sz="500" dirty="0">
               <a:solidFill>
                 <a:schemeClr val="bg1"/>
               </a:solidFill>
@@ -4438,7 +4549,7 @@
         </p:nvSpPr>
         <p:spPr>
           <a:xfrm>
-            <a:off x="3952587" y="1265285"/>
+            <a:off x="3934002" y="865700"/>
             <a:ext cx="2401576" cy="624736"/>
           </a:xfrm>
           <a:prstGeom prst="flowChartPredefinedProcess">
@@ -4484,7 +4595,7 @@
         </p:nvSpPr>
         <p:spPr>
           <a:xfrm>
-            <a:off x="4190440" y="1221785"/>
+            <a:off x="4171855" y="822200"/>
             <a:ext cx="1701079" cy="630942"/>
           </a:xfrm>
           <a:prstGeom prst="rect">
@@ -4644,7 +4755,7 @@
         </p:nvCxnSpPr>
         <p:spPr>
           <a:xfrm>
-            <a:off x="3272642" y="698053"/>
+            <a:off x="2863763" y="1162688"/>
             <a:ext cx="1011700" cy="0"/>
           </a:xfrm>
           <a:prstGeom prst="straightConnector1">
@@ -4686,7 +4797,7 @@
         </p:nvSpPr>
         <p:spPr>
           <a:xfrm>
-            <a:off x="4411516" y="2885006"/>
+            <a:off x="4430101" y="2689860"/>
             <a:ext cx="1453901" cy="442633"/>
           </a:xfrm>
           <a:prstGeom prst="rect">
@@ -4735,7 +4846,7 @@
         </p:nvSpPr>
         <p:spPr>
           <a:xfrm>
-            <a:off x="4411515" y="3605391"/>
+            <a:off x="4430100" y="3410245"/>
             <a:ext cx="1453901" cy="442633"/>
           </a:xfrm>
           <a:prstGeom prst="rect">
@@ -4784,7 +4895,7 @@
         </p:nvSpPr>
         <p:spPr>
           <a:xfrm>
-            <a:off x="4367899" y="2155636"/>
+            <a:off x="4386484" y="1960490"/>
             <a:ext cx="1346160" cy="153888"/>
           </a:xfrm>
           <a:prstGeom prst="rect">
@@ -4841,7 +4952,7 @@
         </p:nvCxnSpPr>
         <p:spPr>
           <a:xfrm>
-            <a:off x="5103845" y="1889119"/>
+            <a:off x="5085260" y="1489534"/>
             <a:ext cx="0" cy="266835"/>
           </a:xfrm>
           <a:prstGeom prst="straightConnector1">
@@ -4885,7 +4996,7 @@
         </p:nvCxnSpPr>
         <p:spPr>
           <a:xfrm>
-            <a:off x="5103845" y="2618171"/>
+            <a:off x="5122430" y="2423025"/>
             <a:ext cx="0" cy="266835"/>
           </a:xfrm>
           <a:prstGeom prst="straightConnector1">
@@ -4929,7 +5040,7 @@
         </p:nvCxnSpPr>
         <p:spPr>
           <a:xfrm>
-            <a:off x="5103845" y="3327639"/>
+            <a:off x="5122430" y="3132493"/>
             <a:ext cx="0" cy="266835"/>
           </a:xfrm>
           <a:prstGeom prst="straightConnector1">
@@ -4971,7 +5082,7 @@
         </p:nvSpPr>
         <p:spPr>
           <a:xfrm>
-            <a:off x="4367899" y="2880672"/>
+            <a:off x="4386484" y="2685526"/>
             <a:ext cx="1346160" cy="153888"/>
           </a:xfrm>
           <a:prstGeom prst="rect">
@@ -5010,7 +5121,7 @@
         </p:nvSpPr>
         <p:spPr>
           <a:xfrm>
-            <a:off x="4367899" y="3594474"/>
+            <a:off x="4386484" y="3399328"/>
             <a:ext cx="1346160" cy="153888"/>
           </a:xfrm>
           <a:prstGeom prst="rect">
@@ -5049,7 +5160,7 @@
         </p:nvSpPr>
         <p:spPr>
           <a:xfrm>
-            <a:off x="2223833" y="3659155"/>
+            <a:off x="2242418" y="3464009"/>
             <a:ext cx="1778647" cy="442618"/>
           </a:xfrm>
           <a:prstGeom prst="flowChartDocument">
@@ -5095,7 +5206,7 @@
         </p:nvSpPr>
         <p:spPr>
           <a:xfrm>
-            <a:off x="2150792" y="3621861"/>
+            <a:off x="2169377" y="3426715"/>
             <a:ext cx="2065750" cy="369332"/>
           </a:xfrm>
           <a:prstGeom prst="rect">
@@ -5173,7 +5284,7 @@
         </p:nvCxnSpPr>
         <p:spPr>
           <a:xfrm flipH="1">
-            <a:off x="4002480" y="3826700"/>
+            <a:off x="4021065" y="3631554"/>
             <a:ext cx="394685" cy="0"/>
           </a:xfrm>
           <a:prstGeom prst="straightConnector1">
@@ -5217,7 +5328,7 @@
         </p:nvCxnSpPr>
         <p:spPr>
           <a:xfrm>
-            <a:off x="5103845" y="4048024"/>
+            <a:off x="5122430" y="3852878"/>
             <a:ext cx="0" cy="266835"/>
           </a:xfrm>
           <a:prstGeom prst="straightConnector1">

--- a/Flowcharts/flowchart I&V.pptx
+++ b/Flowcharts/flowchart I&V.pptx
@@ -114,7 +114,7 @@
 <file path=ppt/revisionInfo.xml><?xml version="1.0" encoding="utf-8"?>
 <p1510:revInfo xmlns:a="http://schemas.openxmlformats.org/drawingml/2006/main" xmlns:r="http://schemas.openxmlformats.org/officeDocument/2006/relationships" xmlns:p1510="http://schemas.microsoft.com/office/powerpoint/2015/10/main">
   <p1510:revLst>
-    <p1510:client id="{8D00378C-A75F-E69D-1EFD-860055A5C78E}" v="64" dt="2026-03-02T15:06:35.120"/>
+    <p1510:client id="{8D00378C-A75F-E69D-1EFD-860055A5C78E}" v="463" dt="2026-03-02T15:16:56.615"/>
   </p1510:revLst>
 </p1510:revInfo>
 </file>
@@ -251,16 +251,32 @@
   <pc:docChgLst>
     <pc:chgData name="Jasper Mulder" userId="S::jkmulder@tudelft.nl::0dd8af4c-5813-4b75-95ce-10a3d81a5b3a" providerId="AD" clId="Web-{8D00378C-A75F-E69D-1EFD-860055A5C78E}"/>
     <pc:docChg chg="modSld">
-      <pc:chgData name="Jasper Mulder" userId="S::jkmulder@tudelft.nl::0dd8af4c-5813-4b75-95ce-10a3d81a5b3a" providerId="AD" clId="Web-{8D00378C-A75F-E69D-1EFD-860055A5C78E}" dt="2026-03-02T15:06:35.120" v="48" actId="1076"/>
+      <pc:chgData name="Jasper Mulder" userId="S::jkmulder@tudelft.nl::0dd8af4c-5813-4b75-95ce-10a3d81a5b3a" providerId="AD" clId="Web-{8D00378C-A75F-E69D-1EFD-860055A5C78E}" dt="2026-03-02T15:16:56.615" v="303" actId="1076"/>
       <pc:docMkLst>
         <pc:docMk/>
       </pc:docMkLst>
-      <pc:sldChg chg="modSp">
-        <pc:chgData name="Jasper Mulder" userId="S::jkmulder@tudelft.nl::0dd8af4c-5813-4b75-95ce-10a3d81a5b3a" providerId="AD" clId="Web-{8D00378C-A75F-E69D-1EFD-860055A5C78E}" dt="2026-03-02T15:06:35.120" v="48" actId="1076"/>
+      <pc:sldChg chg="addSp delSp modSp">
+        <pc:chgData name="Jasper Mulder" userId="S::jkmulder@tudelft.nl::0dd8af4c-5813-4b75-95ce-10a3d81a5b3a" providerId="AD" clId="Web-{8D00378C-A75F-E69D-1EFD-860055A5C78E}" dt="2026-03-02T15:16:56.615" v="303" actId="1076"/>
         <pc:sldMkLst>
           <pc:docMk/>
           <pc:sldMk cId="168350686" sldId="256"/>
         </pc:sldMkLst>
+        <pc:spChg chg="add mod">
+          <ac:chgData name="Jasper Mulder" userId="S::jkmulder@tudelft.nl::0dd8af4c-5813-4b75-95ce-10a3d81a5b3a" providerId="AD" clId="Web-{8D00378C-A75F-E69D-1EFD-860055A5C78E}" dt="2026-03-02T15:15:54.926" v="290" actId="20577"/>
+          <ac:spMkLst>
+            <pc:docMk/>
+            <pc:sldMk cId="168350686" sldId="256"/>
+            <ac:spMk id="2" creationId="{5BEDAB16-352E-DE3B-793C-5D8B9BAC11BB}"/>
+          </ac:spMkLst>
+        </pc:spChg>
+        <pc:spChg chg="add del mod">
+          <ac:chgData name="Jasper Mulder" userId="S::jkmulder@tudelft.nl::0dd8af4c-5813-4b75-95ce-10a3d81a5b3a" providerId="AD" clId="Web-{8D00378C-A75F-E69D-1EFD-860055A5C78E}" dt="2026-03-02T15:14:31.642" v="254"/>
+          <ac:spMkLst>
+            <pc:docMk/>
+            <pc:sldMk cId="168350686" sldId="256"/>
+            <ac:spMk id="3" creationId="{09DA7361-870C-4F0B-D832-C18FE7564853}"/>
+          </ac:spMkLst>
+        </pc:spChg>
         <pc:spChg chg="mod">
           <ac:chgData name="Jasper Mulder" userId="S::jkmulder@tudelft.nl::0dd8af4c-5813-4b75-95ce-10a3d81a5b3a" providerId="AD" clId="Web-{8D00378C-A75F-E69D-1EFD-860055A5C78E}" dt="2026-03-02T14:52:05.653" v="9" actId="1076"/>
           <ac:spMkLst>
@@ -278,11 +294,27 @@
           </ac:spMkLst>
         </pc:spChg>
         <pc:spChg chg="mod">
-          <ac:chgData name="Jasper Mulder" userId="S::jkmulder@tudelft.nl::0dd8af4c-5813-4b75-95ce-10a3d81a5b3a" providerId="AD" clId="Web-{8D00378C-A75F-E69D-1EFD-860055A5C78E}" dt="2026-03-02T15:06:34.870" v="37" actId="1076"/>
+          <ac:chgData name="Jasper Mulder" userId="S::jkmulder@tudelft.nl::0dd8af4c-5813-4b75-95ce-10a3d81a5b3a" providerId="AD" clId="Web-{8D00378C-A75F-E69D-1EFD-860055A5C78E}" dt="2026-03-02T15:11:58.885" v="162" actId="1076"/>
           <ac:spMkLst>
             <pc:docMk/>
             <pc:sldMk cId="168350686" sldId="256"/>
             <ac:spMk id="8" creationId="{2ABC436A-8FB4-15AA-3182-DE8115F4898B}"/>
+          </ac:spMkLst>
+        </pc:spChg>
+        <pc:spChg chg="add mod">
+          <ac:chgData name="Jasper Mulder" userId="S::jkmulder@tudelft.nl::0dd8af4c-5813-4b75-95ce-10a3d81a5b3a" providerId="AD" clId="Web-{8D00378C-A75F-E69D-1EFD-860055A5C78E}" dt="2026-03-02T15:16:18.614" v="291" actId="20577"/>
+          <ac:spMkLst>
+            <pc:docMk/>
+            <pc:sldMk cId="168350686" sldId="256"/>
+            <ac:spMk id="9" creationId="{6B5490F6-6E7B-ADB6-0661-E6AF11CCE764}"/>
+          </ac:spMkLst>
+        </pc:spChg>
+        <pc:spChg chg="mod">
+          <ac:chgData name="Jasper Mulder" userId="S::jkmulder@tudelft.nl::0dd8af4c-5813-4b75-95ce-10a3d81a5b3a" providerId="AD" clId="Web-{8D00378C-A75F-E69D-1EFD-860055A5C78E}" dt="2026-03-02T15:13:06.404" v="201" actId="1076"/>
+          <ac:spMkLst>
+            <pc:docMk/>
+            <pc:sldMk cId="168350686" sldId="256"/>
+            <ac:spMk id="12" creationId="{0E55E6B2-CF31-7A6E-17F1-EE7769655AB3}"/>
           </ac:spMkLst>
         </pc:spChg>
         <pc:spChg chg="mod">
@@ -291,6 +323,14 @@
             <pc:docMk/>
             <pc:sldMk cId="168350686" sldId="256"/>
             <ac:spMk id="13" creationId="{0FD4395A-4374-5AF2-5359-F6534FA3F331}"/>
+          </ac:spMkLst>
+        </pc:spChg>
+        <pc:spChg chg="mod">
+          <ac:chgData name="Jasper Mulder" userId="S::jkmulder@tudelft.nl::0dd8af4c-5813-4b75-95ce-10a3d81a5b3a" providerId="AD" clId="Web-{8D00378C-A75F-E69D-1EFD-860055A5C78E}" dt="2026-03-02T15:13:06.498" v="202" actId="1076"/>
+          <ac:spMkLst>
+            <pc:docMk/>
+            <pc:sldMk cId="168350686" sldId="256"/>
+            <ac:spMk id="15" creationId="{2820D496-09F2-0504-A4A0-99DB7237032C}"/>
           </ac:spMkLst>
         </pc:spChg>
         <pc:spChg chg="mod">
@@ -318,7 +358,7 @@
           </ac:spMkLst>
         </pc:spChg>
         <pc:spChg chg="mod">
-          <ac:chgData name="Jasper Mulder" userId="S::jkmulder@tudelft.nl::0dd8af4c-5813-4b75-95ce-10a3d81a5b3a" providerId="AD" clId="Web-{8D00378C-A75F-E69D-1EFD-860055A5C78E}" dt="2026-03-02T15:06:34.901" v="38" actId="1076"/>
+          <ac:chgData name="Jasper Mulder" userId="S::jkmulder@tudelft.nl::0dd8af4c-5813-4b75-95ce-10a3d81a5b3a" providerId="AD" clId="Web-{8D00378C-A75F-E69D-1EFD-860055A5C78E}" dt="2026-03-02T15:11:58.901" v="163" actId="1076"/>
           <ac:spMkLst>
             <pc:docMk/>
             <pc:sldMk cId="168350686" sldId="256"/>
@@ -326,7 +366,7 @@
           </ac:spMkLst>
         </pc:spChg>
         <pc:spChg chg="mod">
-          <ac:chgData name="Jasper Mulder" userId="S::jkmulder@tudelft.nl::0dd8af4c-5813-4b75-95ce-10a3d81a5b3a" providerId="AD" clId="Web-{8D00378C-A75F-E69D-1EFD-860055A5C78E}" dt="2026-03-02T15:06:34.933" v="39" actId="1076"/>
+          <ac:chgData name="Jasper Mulder" userId="S::jkmulder@tudelft.nl::0dd8af4c-5813-4b75-95ce-10a3d81a5b3a" providerId="AD" clId="Web-{8D00378C-A75F-E69D-1EFD-860055A5C78E}" dt="2026-03-02T15:13:06.529" v="203" actId="1076"/>
           <ac:spMkLst>
             <pc:docMk/>
             <pc:sldMk cId="168350686" sldId="256"/>
@@ -334,15 +374,15 @@
           </ac:spMkLst>
         </pc:spChg>
         <pc:spChg chg="mod">
-          <ac:chgData name="Jasper Mulder" userId="S::jkmulder@tudelft.nl::0dd8af4c-5813-4b75-95ce-10a3d81a5b3a" providerId="AD" clId="Web-{8D00378C-A75F-E69D-1EFD-860055A5C78E}" dt="2026-03-02T15:06:34.964" v="40" actId="1076"/>
+          <ac:chgData name="Jasper Mulder" userId="S::jkmulder@tudelft.nl::0dd8af4c-5813-4b75-95ce-10a3d81a5b3a" providerId="AD" clId="Web-{8D00378C-A75F-E69D-1EFD-860055A5C78E}" dt="2026-03-02T15:11:58.932" v="164" actId="1076"/>
           <ac:spMkLst>
             <pc:docMk/>
             <pc:sldMk cId="168350686" sldId="256"/>
             <ac:spMk id="29" creationId="{D2EA300E-DDED-09B5-E16E-30256819D54F}"/>
           </ac:spMkLst>
         </pc:spChg>
-        <pc:spChg chg="mod">
-          <ac:chgData name="Jasper Mulder" userId="S::jkmulder@tudelft.nl::0dd8af4c-5813-4b75-95ce-10a3d81a5b3a" providerId="AD" clId="Web-{8D00378C-A75F-E69D-1EFD-860055A5C78E}" dt="2026-03-02T15:06:35.018" v="43" actId="1076"/>
+        <pc:spChg chg="add del mod">
+          <ac:chgData name="Jasper Mulder" userId="S::jkmulder@tudelft.nl::0dd8af4c-5813-4b75-95ce-10a3d81a5b3a" providerId="AD" clId="Web-{8D00378C-A75F-E69D-1EFD-860055A5C78E}" dt="2026-03-02T15:15:23.565" v="287" actId="20577"/>
           <ac:spMkLst>
             <pc:docMk/>
             <pc:sldMk cId="168350686" sldId="256"/>
@@ -350,7 +390,7 @@
           </ac:spMkLst>
         </pc:spChg>
         <pc:spChg chg="mod">
-          <ac:chgData name="Jasper Mulder" userId="S::jkmulder@tudelft.nl::0dd8af4c-5813-4b75-95ce-10a3d81a5b3a" providerId="AD" clId="Web-{8D00378C-A75F-E69D-1EFD-860055A5C78E}" dt="2026-03-02T15:06:35.026" v="44" actId="1076"/>
+          <ac:chgData name="Jasper Mulder" userId="S::jkmulder@tudelft.nl::0dd8af4c-5813-4b75-95ce-10a3d81a5b3a" providerId="AD" clId="Web-{8D00378C-A75F-E69D-1EFD-860055A5C78E}" dt="2026-03-02T15:13:06.576" v="204" actId="1076"/>
           <ac:spMkLst>
             <pc:docMk/>
             <pc:sldMk cId="168350686" sldId="256"/>
@@ -358,7 +398,7 @@
           </ac:spMkLst>
         </pc:spChg>
         <pc:spChg chg="mod">
-          <ac:chgData name="Jasper Mulder" userId="S::jkmulder@tudelft.nl::0dd8af4c-5813-4b75-95ce-10a3d81a5b3a" providerId="AD" clId="Web-{8D00378C-A75F-E69D-1EFD-860055A5C78E}" dt="2026-03-02T15:06:35.058" v="45" actId="1076"/>
+          <ac:chgData name="Jasper Mulder" userId="S::jkmulder@tudelft.nl::0dd8af4c-5813-4b75-95ce-10a3d81a5b3a" providerId="AD" clId="Web-{8D00378C-A75F-E69D-1EFD-860055A5C78E}" dt="2026-03-02T15:16:56.615" v="303" actId="1076"/>
           <ac:spMkLst>
             <pc:docMk/>
             <pc:sldMk cId="168350686" sldId="256"/>
@@ -366,13 +406,21 @@
           </ac:spMkLst>
         </pc:spChg>
         <pc:spChg chg="mod">
-          <ac:chgData name="Jasper Mulder" userId="S::jkmulder@tudelft.nl::0dd8af4c-5813-4b75-95ce-10a3d81a5b3a" providerId="AD" clId="Web-{8D00378C-A75F-E69D-1EFD-860055A5C78E}" dt="2026-03-02T15:06:35.089" v="46" actId="1076"/>
+          <ac:chgData name="Jasper Mulder" userId="S::jkmulder@tudelft.nl::0dd8af4c-5813-4b75-95ce-10a3d81a5b3a" providerId="AD" clId="Web-{8D00378C-A75F-E69D-1EFD-860055A5C78E}" dt="2026-03-02T15:16:49.599" v="302" actId="20577"/>
           <ac:spMkLst>
             <pc:docMk/>
             <pc:sldMk cId="168350686" sldId="256"/>
             <ac:spMk id="38" creationId="{8E75A567-86CC-19E9-06BF-65DEAD884672}"/>
           </ac:spMkLst>
         </pc:spChg>
+        <pc:cxnChg chg="add mod">
+          <ac:chgData name="Jasper Mulder" userId="S::jkmulder@tudelft.nl::0dd8af4c-5813-4b75-95ce-10a3d81a5b3a" providerId="AD" clId="Web-{8D00378C-A75F-E69D-1EFD-860055A5C78E}" dt="2026-03-02T15:13:06.795" v="209" actId="1076"/>
+          <ac:cxnSpMkLst>
+            <pc:docMk/>
+            <pc:sldMk cId="168350686" sldId="256"/>
+            <ac:cxnSpMk id="5" creationId="{0046C503-2071-D327-4DCE-AAD42EA6AD9F}"/>
+          </ac:cxnSpMkLst>
+        </pc:cxnChg>
         <pc:cxnChg chg="mod">
           <ac:chgData name="Jasper Mulder" userId="S::jkmulder@tudelft.nl::0dd8af4c-5813-4b75-95ce-10a3d81a5b3a" providerId="AD" clId="Web-{8D00378C-A75F-E69D-1EFD-860055A5C78E}" dt="2026-03-02T14:51:54.871" v="5" actId="1076"/>
           <ac:cxnSpMkLst>
@@ -398,7 +446,7 @@
           </ac:cxnSpMkLst>
         </pc:cxnChg>
         <pc:cxnChg chg="mod">
-          <ac:chgData name="Jasper Mulder" userId="S::jkmulder@tudelft.nl::0dd8af4c-5813-4b75-95ce-10a3d81a5b3a" providerId="AD" clId="Web-{8D00378C-A75F-E69D-1EFD-860055A5C78E}" dt="2026-03-02T15:06:34.964" v="41" actId="1076"/>
+          <ac:chgData name="Jasper Mulder" userId="S::jkmulder@tudelft.nl::0dd8af4c-5813-4b75-95ce-10a3d81a5b3a" providerId="AD" clId="Web-{8D00378C-A75F-E69D-1EFD-860055A5C78E}" dt="2026-03-02T15:11:58.932" v="165" actId="1076"/>
           <ac:cxnSpMkLst>
             <pc:docMk/>
             <pc:sldMk cId="168350686" sldId="256"/>
@@ -406,7 +454,7 @@
           </ac:cxnSpMkLst>
         </pc:cxnChg>
         <pc:cxnChg chg="mod">
-          <ac:chgData name="Jasper Mulder" userId="S::jkmulder@tudelft.nl::0dd8af4c-5813-4b75-95ce-10a3d81a5b3a" providerId="AD" clId="Web-{8D00378C-A75F-E69D-1EFD-860055A5C78E}" dt="2026-03-02T15:06:34.995" v="42" actId="1076"/>
+          <ac:chgData name="Jasper Mulder" userId="S::jkmulder@tudelft.nl::0dd8af4c-5813-4b75-95ce-10a3d81a5b3a" providerId="AD" clId="Web-{8D00378C-A75F-E69D-1EFD-860055A5C78E}" dt="2026-03-02T15:11:58.948" v="166" actId="1076"/>
           <ac:cxnSpMkLst>
             <pc:docMk/>
             <pc:sldMk cId="168350686" sldId="256"/>
@@ -414,7 +462,7 @@
           </ac:cxnSpMkLst>
         </pc:cxnChg>
         <pc:cxnChg chg="mod">
-          <ac:chgData name="Jasper Mulder" userId="S::jkmulder@tudelft.nl::0dd8af4c-5813-4b75-95ce-10a3d81a5b3a" providerId="AD" clId="Web-{8D00378C-A75F-E69D-1EFD-860055A5C78E}" dt="2026-03-02T15:06:35.089" v="47" actId="1076"/>
+          <ac:chgData name="Jasper Mulder" userId="S::jkmulder@tudelft.nl::0dd8af4c-5813-4b75-95ce-10a3d81a5b3a" providerId="AD" clId="Web-{8D00378C-A75F-E69D-1EFD-860055A5C78E}" dt="2026-03-02T15:13:06.748" v="207" actId="1076"/>
           <ac:cxnSpMkLst>
             <pc:docMk/>
             <pc:sldMk cId="168350686" sldId="256"/>
@@ -422,7 +470,7 @@
           </ac:cxnSpMkLst>
         </pc:cxnChg>
         <pc:cxnChg chg="mod">
-          <ac:chgData name="Jasper Mulder" userId="S::jkmulder@tudelft.nl::0dd8af4c-5813-4b75-95ce-10a3d81a5b3a" providerId="AD" clId="Web-{8D00378C-A75F-E69D-1EFD-860055A5C78E}" dt="2026-03-02T15:06:35.120" v="48" actId="1076"/>
+          <ac:chgData name="Jasper Mulder" userId="S::jkmulder@tudelft.nl::0dd8af4c-5813-4b75-95ce-10a3d81a5b3a" providerId="AD" clId="Web-{8D00378C-A75F-E69D-1EFD-860055A5C78E}" dt="2026-03-02T15:13:06.764" v="208" actId="1076"/>
           <ac:cxnSpMkLst>
             <pc:docMk/>
             <pc:sldMk cId="168350686" sldId="256"/>
@@ -4246,7 +4294,7 @@
         </p:nvSpPr>
         <p:spPr>
           <a:xfrm>
-            <a:off x="4430102" y="1971051"/>
+            <a:off x="4411517" y="1840953"/>
             <a:ext cx="1453901" cy="442633"/>
           </a:xfrm>
           <a:prstGeom prst="rect">
@@ -4339,7 +4387,7 @@
         </p:nvSpPr>
         <p:spPr>
           <a:xfrm>
-            <a:off x="4339113" y="4320534"/>
+            <a:off x="4348406" y="4785168"/>
             <a:ext cx="1567540" cy="577875"/>
           </a:xfrm>
           <a:prstGeom prst="flowChartTerminator">
@@ -4426,7 +4474,7 @@
         </p:nvSpPr>
         <p:spPr>
           <a:xfrm>
-            <a:off x="4725956" y="4401801"/>
+            <a:off x="4735249" y="4866436"/>
             <a:ext cx="1194318" cy="369332"/>
           </a:xfrm>
           <a:prstGeom prst="rect">
@@ -4797,7 +4845,7 @@
         </p:nvSpPr>
         <p:spPr>
           <a:xfrm>
-            <a:off x="4430101" y="2689860"/>
+            <a:off x="4411516" y="2559762"/>
             <a:ext cx="1453901" cy="442633"/>
           </a:xfrm>
           <a:prstGeom prst="rect">
@@ -4846,7 +4894,7 @@
         </p:nvSpPr>
         <p:spPr>
           <a:xfrm>
-            <a:off x="4430100" y="3410245"/>
+            <a:off x="4430100" y="4051441"/>
             <a:ext cx="1453901" cy="442633"/>
           </a:xfrm>
           <a:prstGeom prst="rect">
@@ -4895,8 +4943,8 @@
         </p:nvSpPr>
         <p:spPr>
           <a:xfrm>
-            <a:off x="4386484" y="1960490"/>
-            <a:ext cx="1346160" cy="153888"/>
+            <a:off x="4405070" y="1839685"/>
+            <a:ext cx="1346160" cy="461665"/>
           </a:xfrm>
           <a:prstGeom prst="rect">
             <a:avLst/>
@@ -4904,7 +4952,7 @@
           <a:noFill/>
         </p:spPr>
         <p:txBody>
-          <a:bodyPr wrap="square" rtlCol="0">
+          <a:bodyPr wrap="square" lIns="91440" tIns="45720" rIns="91440" bIns="45720" rtlCol="0" anchor="t">
             <a:spAutoFit/>
           </a:bodyPr>
           <a:lstStyle/>
@@ -4915,15 +4963,24 @@
                   <a:schemeClr val="bg1"/>
                 </a:solidFill>
               </a:rPr>
-              <a:t>Aanroepen Class </a:t>
-            </a:r>
-            <a:r>
-              <a:rPr lang="nl-NL" sz="400" err="1">
+              <a:t>Initialiseer Ship klasse met Basisvariabelen</a:t>
+            </a:r>
+          </a:p>
+          <a:p>
+            <a:endParaRPr lang="nl-NL" sz="400" dirty="0">
+              <a:solidFill>
+                <a:schemeClr val="bg1"/>
+              </a:solidFill>
+            </a:endParaRPr>
+          </a:p>
+          <a:p>
+            <a:r>
+              <a:rPr lang="nl-NL" sz="400" dirty="0">
                 <a:solidFill>
                   <a:schemeClr val="bg1"/>
                 </a:solidFill>
               </a:rPr>
-              <a:t>Ship</a:t>
+              <a:t>file, crane_position, jib_length, TP_position, TP_amount, hull_thickness, BHD_thickness, </a:t>
             </a:r>
             <a:r>
               <a:rPr lang="nl-NL" sz="400">
@@ -4931,8 +4988,15 @@
                   <a:schemeClr val="bg1"/>
                 </a:solidFill>
               </a:rPr>
-              <a:t> met bijbehorende functies</a:t>
-            </a:r>
+              <a:t>tank3_initial, slewing_angle,  jib_angle, TP_mass.</a:t>
+            </a:r>
+          </a:p>
+          <a:p>
+            <a:endParaRPr lang="nl-NL" sz="400" dirty="0">
+              <a:solidFill>
+                <a:schemeClr val="bg1"/>
+              </a:solidFill>
+            </a:endParaRPr>
           </a:p>
         </p:txBody>
       </p:sp>
@@ -4996,7 +5060,7 @@
         </p:nvCxnSpPr>
         <p:spPr>
           <a:xfrm>
-            <a:off x="5122430" y="2423025"/>
+            <a:off x="5103845" y="2292927"/>
             <a:ext cx="0" cy="266835"/>
           </a:xfrm>
           <a:prstGeom prst="straightConnector1">
@@ -5040,7 +5104,7 @@
         </p:nvCxnSpPr>
         <p:spPr>
           <a:xfrm>
-            <a:off x="5122430" y="3132493"/>
+            <a:off x="5103845" y="3002395"/>
             <a:ext cx="0" cy="266835"/>
           </a:xfrm>
           <a:prstGeom prst="straightConnector1">
@@ -5082,7 +5146,66 @@
         </p:nvSpPr>
         <p:spPr>
           <a:xfrm>
-            <a:off x="4386484" y="2685526"/>
+            <a:off x="4367899" y="2555428"/>
+            <a:ext cx="1346160" cy="276999"/>
+          </a:xfrm>
+          <a:prstGeom prst="rect">
+            <a:avLst/>
+          </a:prstGeom>
+          <a:noFill/>
+        </p:spPr>
+        <p:txBody>
+          <a:bodyPr wrap="square" lIns="91440" tIns="45720" rIns="91440" bIns="45720" rtlCol="0" anchor="t">
+            <a:spAutoFit/>
+          </a:bodyPr>
+          <a:lstStyle/>
+          <a:p>
+            <a:r>
+              <a:rPr lang="nl-NL" sz="400">
+                <a:solidFill>
+                  <a:schemeClr val="bg1"/>
+                </a:solidFill>
+              </a:rPr>
+              <a:t>Berekend alle vullingen, de momentenstellingen en het evenwicht van de tanks.</a:t>
+            </a:r>
+            <a:endParaRPr lang="nl-NL">
+              <a:solidFill>
+                <a:schemeClr val="bg1"/>
+              </a:solidFill>
+            </a:endParaRPr>
+          </a:p>
+          <a:p>
+            <a:r>
+              <a:rPr lang="nl-NL" sz="400">
+                <a:solidFill>
+                  <a:schemeClr val="bg1"/>
+                </a:solidFill>
+              </a:rPr>
+              <a:t>Functienaam: deck, plates</a:t>
+            </a:r>
+            <a:endParaRPr lang="nl-NL" sz="400" dirty="0">
+              <a:solidFill>
+                <a:schemeClr val="bg1"/>
+              </a:solidFill>
+            </a:endParaRPr>
+          </a:p>
+        </p:txBody>
+      </p:sp>
+      <p:sp>
+        <p:nvSpPr>
+          <p:cNvPr id="34" name="Tekstvak 33">
+            <a:extLst>
+              <a:ext uri="{FF2B5EF4-FFF2-40B4-BE49-F238E27FC236}">
+                <a16:creationId xmlns:a16="http://schemas.microsoft.com/office/drawing/2014/main" id="{512BDE7B-090F-D024-973D-C59BDAD724C3}"/>
+              </a:ext>
+            </a:extLst>
+          </p:cNvPr>
+          <p:cNvSpPr txBox="1"/>
+          <p:nvPr/>
+        </p:nvSpPr>
+        <p:spPr>
+          <a:xfrm>
+            <a:off x="4386484" y="4040524"/>
             <a:ext cx="1346160" cy="153888"/>
           </a:xfrm>
           <a:prstGeom prst="rect">
@@ -5102,65 +5225,26 @@
                   <a:schemeClr val="bg1"/>
                 </a:solidFill>
               </a:rPr>
-              <a:t>Print belangrijke resultaten</a:t>
-            </a:r>
-          </a:p>
-        </p:txBody>
-      </p:sp>
-      <p:sp>
-        <p:nvSpPr>
-          <p:cNvPr id="34" name="Tekstvak 33">
-            <a:extLst>
-              <a:ext uri="{FF2B5EF4-FFF2-40B4-BE49-F238E27FC236}">
-                <a16:creationId xmlns:a16="http://schemas.microsoft.com/office/drawing/2014/main" id="{512BDE7B-090F-D024-973D-C59BDAD724C3}"/>
-              </a:ext>
-            </a:extLst>
-          </p:cNvPr>
-          <p:cNvSpPr txBox="1"/>
+              <a:t>Sla de berekende waardes op in een JSON bestand</a:t>
+            </a:r>
+          </a:p>
+        </p:txBody>
+      </p:sp>
+      <p:sp>
+        <p:nvSpPr>
+          <p:cNvPr id="37" name="Stroomdiagram: Document 36">
+            <a:extLst>
+              <a:ext uri="{FF2B5EF4-FFF2-40B4-BE49-F238E27FC236}">
+                <a16:creationId xmlns:a16="http://schemas.microsoft.com/office/drawing/2014/main" id="{427C294B-E904-3172-3681-F4DF02A7940C}"/>
+              </a:ext>
+            </a:extLst>
+          </p:cNvPr>
+          <p:cNvSpPr/>
           <p:nvPr/>
         </p:nvSpPr>
         <p:spPr>
           <a:xfrm>
-            <a:off x="4386484" y="3399328"/>
-            <a:ext cx="1346160" cy="153888"/>
-          </a:xfrm>
-          <a:prstGeom prst="rect">
-            <a:avLst/>
-          </a:prstGeom>
-          <a:noFill/>
-        </p:spPr>
-        <p:txBody>
-          <a:bodyPr wrap="square" rtlCol="0">
-            <a:spAutoFit/>
-          </a:bodyPr>
-          <a:lstStyle/>
-          <a:p>
-            <a:r>
-              <a:rPr lang="nl-NL" sz="400">
-                <a:solidFill>
-                  <a:schemeClr val="bg1"/>
-                </a:solidFill>
-              </a:rPr>
-              <a:t>Sla de berekende waardes op in een JSON bestand</a:t>
-            </a:r>
-          </a:p>
-        </p:txBody>
-      </p:sp>
-      <p:sp>
-        <p:nvSpPr>
-          <p:cNvPr id="37" name="Stroomdiagram: Document 36">
-            <a:extLst>
-              <a:ext uri="{FF2B5EF4-FFF2-40B4-BE49-F238E27FC236}">
-                <a16:creationId xmlns:a16="http://schemas.microsoft.com/office/drawing/2014/main" id="{427C294B-E904-3172-3681-F4DF02A7940C}"/>
-              </a:ext>
-            </a:extLst>
-          </p:cNvPr>
-          <p:cNvSpPr/>
-          <p:nvPr/>
-        </p:nvSpPr>
-        <p:spPr>
-          <a:xfrm>
-            <a:off x="2242418" y="3464009"/>
+            <a:off x="2233125" y="4068034"/>
             <a:ext cx="1778647" cy="442618"/>
           </a:xfrm>
           <a:prstGeom prst="flowChartDocument">
@@ -5206,7 +5290,7 @@
         </p:nvSpPr>
         <p:spPr>
           <a:xfrm>
-            <a:off x="2169377" y="3426715"/>
+            <a:off x="2169377" y="4067911"/>
             <a:ext cx="2065750" cy="369332"/>
           </a:xfrm>
           <a:prstGeom prst="rect">
@@ -5215,10 +5299,32 @@
           <a:noFill/>
         </p:spPr>
         <p:txBody>
-          <a:bodyPr wrap="square" rtlCol="0">
+          <a:bodyPr wrap="square" lIns="91440" tIns="45720" rIns="91440" bIns="45720" rtlCol="0" anchor="t">
             <a:spAutoFit/>
           </a:bodyPr>
           <a:lstStyle/>
+          <a:p>
+            <a:r>
+              <a:rPr lang="nl-NL" sz="600" dirty="0">
+                <a:solidFill>
+                  <a:schemeClr val="bg1"/>
+                </a:solidFill>
+              </a:rPr>
+              <a:t>Output documents</a:t>
+            </a:r>
+            <a:r>
+              <a:rPr lang="nl-NL" sz="600" dirty="0"/>
+              <a:t>: </a:t>
+            </a:r>
+            <a:r>
+              <a:rPr lang="nl-NL" sz="600" dirty="0">
+                <a:solidFill>
+                  <a:schemeClr val="bg1"/>
+                </a:solidFill>
+              </a:rPr>
+              <a:t>Antwoordenblad_Gr98V1.0.json</a:t>
+            </a:r>
+          </a:p>
           <a:p>
             <a:r>
               <a:rPr lang="nl-NL" sz="600">
@@ -5226,37 +5332,7 @@
                   <a:schemeClr val="bg1"/>
                 </a:solidFill>
               </a:rPr>
-              <a:t>Output </a:t>
-            </a:r>
-            <a:r>
-              <a:rPr lang="nl-NL" sz="600" err="1">
-                <a:solidFill>
-                  <a:schemeClr val="bg1"/>
-                </a:solidFill>
-              </a:rPr>
-              <a:t>documents</a:t>
-            </a:r>
-            <a:r>
-              <a:rPr lang="nl-NL" sz="600"/>
-              <a:t>: </a:t>
-            </a:r>
-            <a:r>
-              <a:rPr lang="nl-NL" sz="600">
-                <a:solidFill>
-                  <a:schemeClr val="bg1"/>
-                </a:solidFill>
-              </a:rPr>
-              <a:t>Antwoordenblad_Gr98V1.0.json</a:t>
-            </a:r>
-          </a:p>
-          <a:p>
-            <a:r>
-              <a:rPr lang="nl-NL" sz="600">
-                <a:solidFill>
-                  <a:schemeClr val="bg1"/>
-                </a:solidFill>
-              </a:rPr>
-              <a:t>Contents:</a:t>
+              <a:t>Contents: Het ingevulde antwoordenblad</a:t>
             </a:r>
           </a:p>
           <a:p>
@@ -5284,7 +5360,7 @@
         </p:nvCxnSpPr>
         <p:spPr>
           <a:xfrm flipH="1">
-            <a:off x="4021065" y="3631554"/>
+            <a:off x="4021065" y="4272750"/>
             <a:ext cx="394685" cy="0"/>
           </a:xfrm>
           <a:prstGeom prst="straightConnector1">
@@ -5328,7 +5404,7 @@
         </p:nvCxnSpPr>
         <p:spPr>
           <a:xfrm>
-            <a:off x="5122430" y="3852878"/>
+            <a:off x="5122430" y="4494074"/>
             <a:ext cx="0" cy="266835"/>
           </a:xfrm>
           <a:prstGeom prst="straightConnector1">
@@ -5356,6 +5432,198 @@
           </a:fontRef>
         </p:style>
       </p:cxnSp>
+      <p:sp>
+        <p:nvSpPr>
+          <p:cNvPr id="2" name="Rechthoek 26">
+            <a:extLst>
+              <a:ext uri="{FF2B5EF4-FFF2-40B4-BE49-F238E27FC236}">
+                <a16:creationId xmlns:a16="http://schemas.microsoft.com/office/drawing/2014/main" id="{5BEDAB16-352E-DE3B-793C-5D8B9BAC11BB}"/>
+              </a:ext>
+            </a:extLst>
+          </p:cNvPr>
+          <p:cNvSpPr/>
+          <p:nvPr/>
+        </p:nvSpPr>
+        <p:spPr>
+          <a:xfrm>
+            <a:off x="4411515" y="3308026"/>
+            <a:ext cx="1453901" cy="442633"/>
+          </a:xfrm>
+          <a:prstGeom prst="rect">
+            <a:avLst/>
+          </a:prstGeom>
+          <a:solidFill>
+            <a:schemeClr val="accent6"/>
+          </a:solidFill>
+        </p:spPr>
+        <p:style>
+          <a:lnRef idx="2">
+            <a:schemeClr val="accent1">
+              <a:shade val="15000"/>
+            </a:schemeClr>
+          </a:lnRef>
+          <a:fillRef idx="1">
+            <a:schemeClr val="accent1"/>
+          </a:fillRef>
+          <a:effectRef idx="0">
+            <a:schemeClr val="accent1"/>
+          </a:effectRef>
+          <a:fontRef idx="minor">
+            <a:schemeClr val="lt1"/>
+          </a:fontRef>
+        </p:style>
+        <p:txBody>
+          <a:bodyPr lIns="91440" tIns="45720" rIns="91440" bIns="45720" rtlCol="0" anchor="ctr"/>
+          <a:lstStyle/>
+          <a:p>
+            <a:pPr algn="ctr"/>
+            <a:r>
+              <a:rPr lang="nl-NL" sz="600">
+                <a:latin typeface="Calibri"/>
+                <a:ea typeface="Calibri"/>
+                <a:cs typeface="Calibri"/>
+              </a:rPr>
+              <a:t>Functienaam: ZCG</a:t>
+            </a:r>
+            <a:endParaRPr lang="en-US"/>
+          </a:p>
+        </p:txBody>
+      </p:sp>
+      <p:cxnSp>
+        <p:nvCxnSpPr>
+          <p:cNvPr id="5" name="Rechte verbindingslijn met pijl 40">
+            <a:extLst>
+              <a:ext uri="{FF2B5EF4-FFF2-40B4-BE49-F238E27FC236}">
+                <a16:creationId xmlns:a16="http://schemas.microsoft.com/office/drawing/2014/main" id="{0046C503-2071-D327-4DCE-AAD42EA6AD9F}"/>
+              </a:ext>
+            </a:extLst>
+          </p:cNvPr>
+          <p:cNvCxnSpPr>
+            <a:cxnSpLocks/>
+          </p:cNvCxnSpPr>
+          <p:nvPr/>
+        </p:nvCxnSpPr>
+        <p:spPr>
+          <a:xfrm>
+            <a:off x="5103845" y="3778537"/>
+            <a:ext cx="0" cy="266835"/>
+          </a:xfrm>
+          <a:prstGeom prst="straightConnector1">
+            <a:avLst/>
+          </a:prstGeom>
+          <a:ln>
+            <a:solidFill>
+              <a:schemeClr val="tx1"/>
+            </a:solidFill>
+            <a:tailEnd type="triangle"/>
+          </a:ln>
+        </p:spPr>
+        <p:style>
+          <a:lnRef idx="2">
+            <a:schemeClr val="accent1"/>
+          </a:lnRef>
+          <a:fillRef idx="0">
+            <a:schemeClr val="accent1"/>
+          </a:fillRef>
+          <a:effectRef idx="1">
+            <a:schemeClr val="accent1"/>
+          </a:effectRef>
+          <a:fontRef idx="minor">
+            <a:schemeClr val="tx1"/>
+          </a:fontRef>
+        </p:style>
+      </p:cxnSp>
+      <p:sp>
+        <p:nvSpPr>
+          <p:cNvPr id="9" name="Tekstvak 33">
+            <a:extLst>
+              <a:ext uri="{FF2B5EF4-FFF2-40B4-BE49-F238E27FC236}">
+                <a16:creationId xmlns:a16="http://schemas.microsoft.com/office/drawing/2014/main" id="{6B5490F6-6E7B-ADB6-0661-E6AF11CCE764}"/>
+              </a:ext>
+            </a:extLst>
+          </p:cNvPr>
+          <p:cNvSpPr txBox="1"/>
+          <p:nvPr/>
+        </p:nvSpPr>
+        <p:spPr>
+          <a:xfrm>
+            <a:off x="4451533" y="3352865"/>
+            <a:ext cx="1346160" cy="461665"/>
+          </a:xfrm>
+          <a:prstGeom prst="rect">
+            <a:avLst/>
+          </a:prstGeom>
+          <a:noFill/>
+        </p:spPr>
+        <p:txBody>
+          <a:bodyPr wrap="square" lIns="91440" tIns="45720" rIns="91440" bIns="45720" rtlCol="0" anchor="t">
+            <a:spAutoFit/>
+          </a:bodyPr>
+          <a:lstStyle/>
+          <a:p>
+            <a:r>
+              <a:rPr lang="nl-NL" sz="400">
+                <a:solidFill>
+                  <a:schemeClr val="bg1"/>
+                </a:solidFill>
+              </a:rPr>
+              <a:t>Bereken totale schipdata.</a:t>
+            </a:r>
+            <a:endParaRPr lang="nl-NL">
+              <a:solidFill>
+                <a:schemeClr val="bg1"/>
+              </a:solidFill>
+            </a:endParaRPr>
+          </a:p>
+          <a:p>
+            <a:r>
+              <a:rPr lang="nl-NL" sz="400">
+                <a:solidFill>
+                  <a:schemeClr val="bg1"/>
+                </a:solidFill>
+              </a:rPr>
+              <a:t>KG</a:t>
+            </a:r>
+          </a:p>
+          <a:p>
+            <a:r>
+              <a:rPr lang="nl-NL" sz="400">
+                <a:solidFill>
+                  <a:schemeClr val="bg1"/>
+                </a:solidFill>
+              </a:rPr>
+              <a:t>KB</a:t>
+            </a:r>
+          </a:p>
+          <a:p>
+            <a:r>
+              <a:rPr lang="nl-NL" sz="400">
+                <a:solidFill>
+                  <a:schemeClr val="bg1"/>
+                </a:solidFill>
+              </a:rPr>
+              <a:t>BM</a:t>
+            </a:r>
+          </a:p>
+          <a:p>
+            <a:r>
+              <a:rPr lang="nl-NL" sz="400">
+                <a:solidFill>
+                  <a:schemeClr val="bg1"/>
+                </a:solidFill>
+              </a:rPr>
+              <a:t>GM</a:t>
+            </a:r>
+          </a:p>
+          <a:p>
+            <a:endParaRPr lang="nl-NL" sz="400" dirty="0">
+              <a:solidFill>
+                <a:schemeClr val="bg1"/>
+              </a:solidFill>
+            </a:endParaRPr>
+          </a:p>
+        </p:txBody>
+      </p:sp>
     </p:spTree>
     <p:extLst>
       <p:ext uri="{BB962C8B-B14F-4D97-AF65-F5344CB8AC3E}">
